--- a/MissVarPath_Presentation_v2.pptx
+++ b/MissVarPath_Presentation_v2.pptx
@@ -5,29 +5,29 @@
     <p:sldMasterId id="2147483648" r:id="rId1"/>
   </p:sldMasterIdLst>
   <p:sldIdLst>
-    <p:sldId id="256" r:id="rId7"/>
-    <p:sldId id="257" r:id="rId8"/>
-    <p:sldId id="258" r:id="rId9"/>
-    <p:sldId id="259" r:id="rId10"/>
-    <p:sldId id="260" r:id="rId11"/>
-    <p:sldId id="261" r:id="rId12"/>
-    <p:sldId id="262" r:id="rId13"/>
-    <p:sldId id="263" r:id="rId14"/>
-    <p:sldId id="264" r:id="rId15"/>
-    <p:sldId id="265" r:id="rId16"/>
-    <p:sldId id="266" r:id="rId17"/>
-    <p:sldId id="267" r:id="rId18"/>
-    <p:sldId id="268" r:id="rId19"/>
-    <p:sldId id="269" r:id="rId20"/>
-    <p:sldId id="270" r:id="rId21"/>
-    <p:sldId id="271" r:id="rId22"/>
-    <p:sldId id="272" r:id="rId23"/>
-    <p:sldId id="273" r:id="rId24"/>
-    <p:sldId id="274" r:id="rId25"/>
-    <p:sldId id="275" r:id="rId26"/>
-    <p:sldId id="276" r:id="rId27"/>
+    <p:sldId id="256" r:id="rId2"/>
+    <p:sldId id="257" r:id="rId3"/>
+    <p:sldId id="258" r:id="rId4"/>
+    <p:sldId id="259" r:id="rId5"/>
+    <p:sldId id="260" r:id="rId6"/>
+    <p:sldId id="261" r:id="rId7"/>
+    <p:sldId id="262" r:id="rId8"/>
+    <p:sldId id="263" r:id="rId9"/>
+    <p:sldId id="264" r:id="rId10"/>
+    <p:sldId id="265" r:id="rId11"/>
+    <p:sldId id="266" r:id="rId12"/>
+    <p:sldId id="267" r:id="rId13"/>
+    <p:sldId id="268" r:id="rId14"/>
+    <p:sldId id="269" r:id="rId15"/>
+    <p:sldId id="270" r:id="rId16"/>
+    <p:sldId id="271" r:id="rId17"/>
+    <p:sldId id="272" r:id="rId18"/>
+    <p:sldId id="273" r:id="rId19"/>
+    <p:sldId id="274" r:id="rId20"/>
+    <p:sldId id="275" r:id="rId21"/>
+    <p:sldId id="276" r:id="rId22"/>
   </p:sldIdLst>
-  <p:sldSz cx="12191695" cy="6858000" type="screen4x3"/>
+  <p:sldSz cx="12192000" cy="6858000"/>
   <p:notesSz cx="6858000" cy="9144000"/>
   <p:defaultTextStyle>
     <a:defPPr>
@@ -124,18 +124,39 @@
       </a:defRPr>
     </a:lvl9pPr>
   </p:defaultTextStyle>
+  <p:extLst>
+    <p:ext uri="{EFAFB233-063F-42B5-8137-9DF3F51BA10A}">
+      <p15:sldGuideLst xmlns:p15="http://schemas.microsoft.com/office/powerpoint/2012/main">
+        <p15:guide id="1" orient="horz" pos="2160">
+          <p15:clr>
+            <a:srgbClr val="A4A3A4"/>
+          </p15:clr>
+        </p15:guide>
+        <p15:guide id="2" pos="2880">
+          <p15:clr>
+            <a:srgbClr val="A4A3A4"/>
+          </p15:clr>
+        </p15:guide>
+      </p15:sldGuideLst>
+    </p:ext>
+  </p:extLst>
 </p:presentation>
 </file>
 
 <file path=ppt/charts/chart1.xml><?xml version="1.0" encoding="utf-8"?>
-<c:chartSpace xmlns:c="http://schemas.openxmlformats.org/drawingml/2006/chart" xmlns:a="http://schemas.openxmlformats.org/drawingml/2006/main" xmlns:r="http://schemas.openxmlformats.org/officeDocument/2006/relationships">
+<c:chartSpace xmlns:c="http://schemas.openxmlformats.org/drawingml/2006/chart" xmlns:a="http://schemas.openxmlformats.org/drawingml/2006/main" xmlns:r="http://schemas.openxmlformats.org/officeDocument/2006/relationships" xmlns:c16r2="http://schemas.microsoft.com/office/drawing/2015/06/chart">
   <c:date1904 val="0"/>
+  <c:lang val="en-US"/>
+  <c:roundedCorners val="1"/>
+  <c:style val="2"/>
   <c:chart>
     <c:autoTitleDeleted val="1"/>
     <c:plotArea>
+      <c:layout/>
       <c:barChart>
         <c:barDir val="bar"/>
         <c:grouping val="clustered"/>
+        <c:varyColors val="1"/>
         <c:ser>
           <c:idx val="0"/>
           <c:order val="0"/>
@@ -160,6 +181,45 @@
               </a:solidFill>
             </a:ln>
           </c:spPr>
+          <c:invertIfNegative val="1"/>
+          <c:dLbls>
+            <c:numFmt formatCode="0.000" sourceLinked="0"/>
+            <c:spPr>
+              <a:noFill/>
+              <a:ln>
+                <a:noFill/>
+              </a:ln>
+              <a:effectLst/>
+            </c:spPr>
+            <c:txPr>
+              <a:bodyPr/>
+              <a:lstStyle/>
+              <a:p>
+                <a:pPr>
+                  <a:defRPr sz="1200">
+                    <a:solidFill>
+                      <a:srgbClr val="202020"/>
+                    </a:solidFill>
+                    <a:latin typeface="Calibri"/>
+                  </a:defRPr>
+                </a:pPr>
+                <a:endParaRPr lang="en-US"/>
+              </a:p>
+            </c:txPr>
+            <c:dLblPos val="outEnd"/>
+            <c:showLegendKey val="0"/>
+            <c:showVal val="1"/>
+            <c:showCatName val="0"/>
+            <c:showSerName val="0"/>
+            <c:showPercent val="0"/>
+            <c:showBubbleSize val="0"/>
+            <c:showLeaderLines val="0"/>
+            <c:extLst>
+              <c:ext xmlns:c15="http://schemas.microsoft.com/office/drawing/2012/chart" uri="{CE6537A1-D6FC-4f65-9D91-7224C49458BB}">
+                <c15:showLeaderLines val="0"/>
+              </c:ext>
+            </c:extLst>
+          </c:dLbls>
           <c:cat>
             <c:strRef>
               <c:f>Sheet1!$A$2:$A$8</c:f>
@@ -196,46 +256,50 @@
                 <c:formatCode>General</c:formatCode>
                 <c:ptCount val="7"/>
                 <c:pt idx="0">
-                  <c:v>0.6597909745251019</c:v>
+                  <c:v>0.65979097452510194</c:v>
                 </c:pt>
                 <c:pt idx="1">
-                  <c:v>0.7003232293438628</c:v>
+                  <c:v>0.70032322934386282</c:v>
                 </c:pt>
                 <c:pt idx="2">
-                  <c:v>0.702199015949549</c:v>
+                  <c:v>0.70219901594954903</c:v>
                 </c:pt>
                 <c:pt idx="3">
-                  <c:v>0.7182084960604684</c:v>
+                  <c:v>0.71820849606046844</c:v>
                 </c:pt>
                 <c:pt idx="4">
-                  <c:v>0.7514090067859782</c:v>
+                  <c:v>0.75140900678597822</c:v>
                 </c:pt>
                 <c:pt idx="5">
-                  <c:v>0.754933552727006</c:v>
+                  <c:v>0.75493355272700602</c:v>
                 </c:pt>
                 <c:pt idx="6">
-                  <c:v>0.7950392616951822</c:v>
+                  <c:v>0.79503926169518224</c:v>
                 </c:pt>
               </c:numCache>
             </c:numRef>
           </c:val>
+          <c:extLst>
+            <c:ext xmlns:c14="http://schemas.microsoft.com/office/drawing/2007/8/2/chart" uri="{6F2FDCE9-48DA-4B69-8628-5D25D57E5C99}">
+              <c14:invertSolidFillFmt>
+                <c14:spPr xmlns:c14="http://schemas.microsoft.com/office/drawing/2007/8/2/chart">
+                  <a:solidFill>
+                    <a:srgbClr val="FFFFFF"/>
+                  </a:solidFill>
+                  <a:ln w="9525">
+                    <a:solidFill>
+                      <a:srgbClr val="202020"/>
+                    </a:solidFill>
+                  </a:ln>
+                </c14:spPr>
+              </c14:invertSolidFillFmt>
+            </c:ext>
+            <c:ext xmlns:c16="http://schemas.microsoft.com/office/drawing/2014/chart" uri="{C3380CC4-5D6E-409C-BE32-E72D297353CC}">
+              <c16:uniqueId val="{00000000-1AFF-4212-BF40-D78A32B98812}"/>
+            </c:ext>
+          </c:extLst>
         </c:ser>
         <c:dLbls>
-          <c:numFmt formatCode="0.000" sourceLinked="0"/>
-          <c:txPr>
-            <a:bodyPr/>
-            <a:lstStyle/>
-            <a:p>
-              <a:pPr>
-                <a:defRPr sz="1200">
-                  <a:solidFill>
-                    <a:srgbClr val="202020"/>
-                  </a:solidFill>
-                  <a:latin typeface="Calibri"/>
-                </a:defRPr>
-              </a:pPr>
-            </a:p>
-          </c:txPr>
           <c:dLblPos val="outEnd"/>
           <c:showLegendKey val="0"/>
           <c:showVal val="1"/>
@@ -243,8 +307,8 @@
           <c:showSerName val="0"/>
           <c:showPercent val="0"/>
           <c:showBubbleSize val="0"/>
-          <c:showLeaderLines val="1"/>
         </c:dLbls>
+        <c:gapWidth val="150"/>
         <c:axId val="-2068027336"/>
         <c:axId val="-2113994440"/>
       </c:barChart>
@@ -262,6 +326,7 @@
             </a:ln>
           </c:spPr>
         </c:majorGridlines>
+        <c:numFmt formatCode="General" sourceLinked="0"/>
         <c:majorTickMark val="out"/>
         <c:minorTickMark val="none"/>
         <c:tickLblPos val="nextTo"/>
@@ -284,6 +349,7 @@
                 <a:latin typeface="Calibri"/>
               </a:defRPr>
             </a:pPr>
+            <a:endParaRPr lang="en-US"/>
           </a:p>
         </c:txPr>
         <c:crossAx val="-2113994440"/>
@@ -296,12 +362,14 @@
       <c:valAx>
         <c:axId val="-2113994440"/>
         <c:scaling>
+          <c:orientation val="minMax"/>
           <c:max val="0.85"/>
           <c:min val="0.5"/>
         </c:scaling>
         <c:delete val="0"/>
         <c:axPos val="b"/>
         <c:majorGridlines/>
+        <c:numFmt formatCode="General" sourceLinked="1"/>
         <c:majorTickMark val="out"/>
         <c:minorTickMark val="none"/>
         <c:tickLblPos val="nextTo"/>
@@ -324,13 +392,17 @@
                 <a:latin typeface="Calibri"/>
               </a:defRPr>
             </a:pPr>
+            <a:endParaRPr lang="en-US"/>
           </a:p>
         </c:txPr>
         <c:crossAx val="-2068027336"/>
         <c:crosses val="autoZero"/>
+        <c:crossBetween val="between"/>
       </c:valAx>
     </c:plotArea>
+    <c:plotVisOnly val="1"/>
     <c:dispBlanksAs val="gap"/>
+    <c:showDLblsOverMax val="1"/>
   </c:chart>
   <c:txPr>
     <a:bodyPr/>
@@ -349,14 +421,19 @@
 </file>
 
 <file path=ppt/charts/chart2.xml><?xml version="1.0" encoding="utf-8"?>
-<c:chartSpace xmlns:c="http://schemas.openxmlformats.org/drawingml/2006/chart" xmlns:a="http://schemas.openxmlformats.org/drawingml/2006/main" xmlns:r="http://schemas.openxmlformats.org/officeDocument/2006/relationships">
+<c:chartSpace xmlns:c="http://schemas.openxmlformats.org/drawingml/2006/chart" xmlns:a="http://schemas.openxmlformats.org/drawingml/2006/main" xmlns:r="http://schemas.openxmlformats.org/officeDocument/2006/relationships" xmlns:c16r2="http://schemas.microsoft.com/office/drawing/2015/06/chart">
   <c:date1904 val="0"/>
+  <c:lang val="en-US"/>
+  <c:roundedCorners val="1"/>
+  <c:style val="2"/>
   <c:chart>
     <c:autoTitleDeleted val="1"/>
     <c:plotArea>
+      <c:layout/>
       <c:barChart>
         <c:barDir val="col"/>
         <c:grouping val="clustered"/>
+        <c:varyColors val="1"/>
         <c:ser>
           <c:idx val="0"/>
           <c:order val="0"/>
@@ -381,6 +458,45 @@
               </a:solidFill>
             </a:ln>
           </c:spPr>
+          <c:invertIfNegative val="1"/>
+          <c:dLbls>
+            <c:numFmt formatCode="0.000" sourceLinked="0"/>
+            <c:spPr>
+              <a:noFill/>
+              <a:ln>
+                <a:noFill/>
+              </a:ln>
+              <a:effectLst/>
+            </c:spPr>
+            <c:txPr>
+              <a:bodyPr/>
+              <a:lstStyle/>
+              <a:p>
+                <a:pPr>
+                  <a:defRPr sz="1200">
+                    <a:solidFill>
+                      <a:srgbClr val="202020"/>
+                    </a:solidFill>
+                    <a:latin typeface="Calibri"/>
+                  </a:defRPr>
+                </a:pPr>
+                <a:endParaRPr lang="en-US"/>
+              </a:p>
+            </c:txPr>
+            <c:dLblPos val="outEnd"/>
+            <c:showLegendKey val="0"/>
+            <c:showVal val="1"/>
+            <c:showCatName val="0"/>
+            <c:showSerName val="0"/>
+            <c:showPercent val="0"/>
+            <c:showBubbleSize val="0"/>
+            <c:showLeaderLines val="0"/>
+            <c:extLst>
+              <c:ext xmlns:c15="http://schemas.microsoft.com/office/drawing/2012/chart" uri="{CE6537A1-D6FC-4f65-9D91-7224C49458BB}">
+                <c15:showLeaderLines val="0"/>
+              </c:ext>
+            </c:extLst>
+          </c:dLbls>
           <c:cat>
             <c:strRef>
               <c:f>Sheet1!$A$2:$A$6</c:f>
@@ -411,40 +527,44 @@
                 <c:formatCode>General</c:formatCode>
                 <c:ptCount val="5"/>
                 <c:pt idx="0">
-                  <c:v>0.929</c:v>
+                  <c:v>0.92900000000000005</c:v>
                 </c:pt>
                 <c:pt idx="1">
-                  <c:v>0.894</c:v>
+                  <c:v>0.89400000000000002</c:v>
                 </c:pt>
                 <c:pt idx="2">
                   <c:v>0.622</c:v>
                 </c:pt>
                 <c:pt idx="3">
-                  <c:v>0.646</c:v>
+                  <c:v>0.64600000000000002</c:v>
                 </c:pt>
                 <c:pt idx="4">
-                  <c:v>0.901</c:v>
+                  <c:v>0.90100000000000002</c:v>
                 </c:pt>
               </c:numCache>
             </c:numRef>
           </c:val>
+          <c:extLst>
+            <c:ext xmlns:c14="http://schemas.microsoft.com/office/drawing/2007/8/2/chart" uri="{6F2FDCE9-48DA-4B69-8628-5D25D57E5C99}">
+              <c14:invertSolidFillFmt>
+                <c14:spPr xmlns:c14="http://schemas.microsoft.com/office/drawing/2007/8/2/chart">
+                  <a:solidFill>
+                    <a:srgbClr val="FFFFFF"/>
+                  </a:solidFill>
+                  <a:ln w="9525">
+                    <a:solidFill>
+                      <a:srgbClr val="202020"/>
+                    </a:solidFill>
+                  </a:ln>
+                </c14:spPr>
+              </c14:invertSolidFillFmt>
+            </c:ext>
+            <c:ext xmlns:c16="http://schemas.microsoft.com/office/drawing/2014/chart" uri="{C3380CC4-5D6E-409C-BE32-E72D297353CC}">
+              <c16:uniqueId val="{00000000-009C-4822-BA55-53EDC43CA196}"/>
+            </c:ext>
+          </c:extLst>
         </c:ser>
         <c:dLbls>
-          <c:numFmt formatCode="0.000" sourceLinked="0"/>
-          <c:txPr>
-            <a:bodyPr/>
-            <a:lstStyle/>
-            <a:p>
-              <a:pPr>
-                <a:defRPr sz="1200">
-                  <a:solidFill>
-                    <a:srgbClr val="202020"/>
-                  </a:solidFill>
-                  <a:latin typeface="Calibri"/>
-                </a:defRPr>
-              </a:pPr>
-            </a:p>
-          </c:txPr>
           <c:dLblPos val="outEnd"/>
           <c:showLegendKey val="0"/>
           <c:showVal val="1"/>
@@ -452,8 +572,8 @@
           <c:showSerName val="0"/>
           <c:showPercent val="0"/>
           <c:showBubbleSize val="0"/>
-          <c:showLeaderLines val="1"/>
         </c:dLbls>
+        <c:gapWidth val="150"/>
         <c:axId val="-2068027336"/>
         <c:axId val="-2113994440"/>
       </c:barChart>
@@ -471,6 +591,7 @@
             </a:ln>
           </c:spPr>
         </c:majorGridlines>
+        <c:numFmt formatCode="General" sourceLinked="0"/>
         <c:majorTickMark val="out"/>
         <c:minorTickMark val="none"/>
         <c:tickLblPos val="nextTo"/>
@@ -493,6 +614,7 @@
                 <a:latin typeface="Calibri"/>
               </a:defRPr>
             </a:pPr>
+            <a:endParaRPr lang="en-US"/>
           </a:p>
         </c:txPr>
         <c:crossAx val="-2113994440"/>
@@ -505,12 +627,14 @@
       <c:valAx>
         <c:axId val="-2113994440"/>
         <c:scaling>
-          <c:max val="1.0"/>
+          <c:orientation val="minMax"/>
+          <c:max val="1"/>
           <c:min val="0.5"/>
         </c:scaling>
         <c:delete val="0"/>
         <c:axPos val="l"/>
         <c:majorGridlines/>
+        <c:numFmt formatCode="General" sourceLinked="1"/>
         <c:majorTickMark val="out"/>
         <c:minorTickMark val="none"/>
         <c:tickLblPos val="nextTo"/>
@@ -533,13 +657,17 @@
                 <a:latin typeface="Calibri"/>
               </a:defRPr>
             </a:pPr>
+            <a:endParaRPr lang="en-US"/>
           </a:p>
         </c:txPr>
         <c:crossAx val="-2068027336"/>
         <c:crosses val="autoZero"/>
+        <c:crossBetween val="between"/>
       </c:valAx>
     </c:plotArea>
+    <c:plotVisOnly val="1"/>
     <c:dispBlanksAs val="gap"/>
+    <c:showDLblsOverMax val="1"/>
   </c:chart>
   <c:txPr>
     <a:bodyPr/>
@@ -558,14 +686,19 @@
 </file>
 
 <file path=ppt/charts/chart3.xml><?xml version="1.0" encoding="utf-8"?>
-<c:chartSpace xmlns:c="http://schemas.openxmlformats.org/drawingml/2006/chart" xmlns:a="http://schemas.openxmlformats.org/drawingml/2006/main" xmlns:r="http://schemas.openxmlformats.org/officeDocument/2006/relationships">
+<c:chartSpace xmlns:c="http://schemas.openxmlformats.org/drawingml/2006/chart" xmlns:a="http://schemas.openxmlformats.org/drawingml/2006/main" xmlns:r="http://schemas.openxmlformats.org/officeDocument/2006/relationships" xmlns:c16r2="http://schemas.microsoft.com/office/drawing/2015/06/chart">
   <c:date1904 val="0"/>
+  <c:lang val="en-US"/>
+  <c:roundedCorners val="1"/>
+  <c:style val="2"/>
   <c:chart>
     <c:autoTitleDeleted val="1"/>
     <c:plotArea>
+      <c:layout/>
       <c:barChart>
         <c:barDir val="col"/>
         <c:grouping val="clustered"/>
+        <c:varyColors val="1"/>
         <c:ser>
           <c:idx val="0"/>
           <c:order val="0"/>
@@ -590,6 +723,45 @@
               </a:solidFill>
             </a:ln>
           </c:spPr>
+          <c:invertIfNegative val="1"/>
+          <c:dLbls>
+            <c:numFmt formatCode="0.000" sourceLinked="0"/>
+            <c:spPr>
+              <a:noFill/>
+              <a:ln>
+                <a:noFill/>
+              </a:ln>
+              <a:effectLst/>
+            </c:spPr>
+            <c:txPr>
+              <a:bodyPr/>
+              <a:lstStyle/>
+              <a:p>
+                <a:pPr>
+                  <a:defRPr sz="1100">
+                    <a:solidFill>
+                      <a:srgbClr val="404040"/>
+                    </a:solidFill>
+                    <a:latin typeface="Calibri"/>
+                  </a:defRPr>
+                </a:pPr>
+                <a:endParaRPr lang="en-US"/>
+              </a:p>
+            </c:txPr>
+            <c:dLblPos val="outEnd"/>
+            <c:showLegendKey val="0"/>
+            <c:showVal val="1"/>
+            <c:showCatName val="0"/>
+            <c:showSerName val="0"/>
+            <c:showPercent val="0"/>
+            <c:showBubbleSize val="0"/>
+            <c:showLeaderLines val="0"/>
+            <c:extLst>
+              <c:ext xmlns:c15="http://schemas.microsoft.com/office/drawing/2012/chart" uri="{CE6537A1-D6FC-4f65-9D91-7224C49458BB}">
+                <c15:showLeaderLines val="0"/>
+              </c:ext>
+            </c:extLst>
+          </c:dLbls>
           <c:cat>
             <c:strRef>
               <c:f>Sheet1!$A$2:$A$5</c:f>
@@ -617,13 +789,13 @@
                 <c:formatCode>General</c:formatCode>
                 <c:ptCount val="4"/>
                 <c:pt idx="0">
-                  <c:v>0.9872</c:v>
+                  <c:v>0.98719999999999997</c:v>
                 </c:pt>
                 <c:pt idx="1">
-                  <c:v>0.9459</c:v>
+                  <c:v>0.94589999999999996</c:v>
                 </c:pt>
                 <c:pt idx="2">
-                  <c:v>0.795</c:v>
+                  <c:v>0.79500000000000004</c:v>
                 </c:pt>
                 <c:pt idx="3">
                   <c:v>0.7984</c:v>
@@ -631,6 +803,25 @@
               </c:numCache>
             </c:numRef>
           </c:val>
+          <c:extLst>
+            <c:ext xmlns:c14="http://schemas.microsoft.com/office/drawing/2007/8/2/chart" uri="{6F2FDCE9-48DA-4B69-8628-5D25D57E5C99}">
+              <c14:invertSolidFillFmt>
+                <c14:spPr xmlns:c14="http://schemas.microsoft.com/office/drawing/2007/8/2/chart">
+                  <a:solidFill>
+                    <a:srgbClr val="FFFFFF"/>
+                  </a:solidFill>
+                  <a:ln w="9525">
+                    <a:solidFill>
+                      <a:srgbClr val="202020"/>
+                    </a:solidFill>
+                  </a:ln>
+                </c14:spPr>
+              </c14:invertSolidFillFmt>
+            </c:ext>
+            <c:ext xmlns:c16="http://schemas.microsoft.com/office/drawing/2014/chart" uri="{C3380CC4-5D6E-409C-BE32-E72D297353CC}">
+              <c16:uniqueId val="{00000000-C89B-4ABD-85FA-F1DDA4919833}"/>
+            </c:ext>
+          </c:extLst>
         </c:ser>
         <c:ser>
           <c:idx val="1"/>
@@ -656,6 +847,45 @@
               </a:solidFill>
             </a:ln>
           </c:spPr>
+          <c:invertIfNegative val="1"/>
+          <c:dLbls>
+            <c:numFmt formatCode="0.000" sourceLinked="0"/>
+            <c:spPr>
+              <a:noFill/>
+              <a:ln>
+                <a:noFill/>
+              </a:ln>
+              <a:effectLst/>
+            </c:spPr>
+            <c:txPr>
+              <a:bodyPr/>
+              <a:lstStyle/>
+              <a:p>
+                <a:pPr>
+                  <a:defRPr sz="1100">
+                    <a:solidFill>
+                      <a:srgbClr val="404040"/>
+                    </a:solidFill>
+                    <a:latin typeface="Calibri"/>
+                  </a:defRPr>
+                </a:pPr>
+                <a:endParaRPr lang="en-US"/>
+              </a:p>
+            </c:txPr>
+            <c:dLblPos val="outEnd"/>
+            <c:showLegendKey val="0"/>
+            <c:showVal val="1"/>
+            <c:showCatName val="0"/>
+            <c:showSerName val="0"/>
+            <c:showPercent val="0"/>
+            <c:showBubbleSize val="0"/>
+            <c:showLeaderLines val="0"/>
+            <c:extLst>
+              <c:ext xmlns:c15="http://schemas.microsoft.com/office/drawing/2012/chart" uri="{CE6537A1-D6FC-4f65-9D91-7224C49458BB}">
+                <c15:showLeaderLines val="0"/>
+              </c:ext>
+            </c:extLst>
+          </c:dLbls>
           <c:cat>
             <c:strRef>
               <c:f>Sheet1!$A$2:$A$5</c:f>
@@ -683,37 +913,41 @@
                 <c:formatCode>General</c:formatCode>
                 <c:ptCount val="4"/>
                 <c:pt idx="0">
-                  <c:v>0.9863</c:v>
+                  <c:v>0.98629999999999995</c:v>
                 </c:pt>
                 <c:pt idx="1">
-                  <c:v>0.9386</c:v>
+                  <c:v>0.93859999999999999</c:v>
                 </c:pt>
                 <c:pt idx="2">
                   <c:v>0.79</c:v>
                 </c:pt>
                 <c:pt idx="3">
-                  <c:v>0.7867</c:v>
+                  <c:v>0.78669999999999995</c:v>
                 </c:pt>
               </c:numCache>
             </c:numRef>
           </c:val>
+          <c:extLst>
+            <c:ext xmlns:c14="http://schemas.microsoft.com/office/drawing/2007/8/2/chart" uri="{6F2FDCE9-48DA-4B69-8628-5D25D57E5C99}">
+              <c14:invertSolidFillFmt>
+                <c14:spPr xmlns:c14="http://schemas.microsoft.com/office/drawing/2007/8/2/chart">
+                  <a:solidFill>
+                    <a:srgbClr val="FFFFFF"/>
+                  </a:solidFill>
+                  <a:ln w="9525">
+                    <a:solidFill>
+                      <a:srgbClr val="202020"/>
+                    </a:solidFill>
+                  </a:ln>
+                </c14:spPr>
+              </c14:invertSolidFillFmt>
+            </c:ext>
+            <c:ext xmlns:c16="http://schemas.microsoft.com/office/drawing/2014/chart" uri="{C3380CC4-5D6E-409C-BE32-E72D297353CC}">
+              <c16:uniqueId val="{00000001-C89B-4ABD-85FA-F1DDA4919833}"/>
+            </c:ext>
+          </c:extLst>
         </c:ser>
         <c:dLbls>
-          <c:numFmt formatCode="0.000" sourceLinked="0"/>
-          <c:txPr>
-            <a:bodyPr/>
-            <a:lstStyle/>
-            <a:p>
-              <a:pPr>
-                <a:defRPr sz="1100">
-                  <a:solidFill>
-                    <a:srgbClr val="404040"/>
-                  </a:solidFill>
-                  <a:latin typeface="Calibri"/>
-                </a:defRPr>
-              </a:pPr>
-            </a:p>
-          </c:txPr>
           <c:dLblPos val="outEnd"/>
           <c:showLegendKey val="0"/>
           <c:showVal val="1"/>
@@ -721,8 +955,8 @@
           <c:showSerName val="0"/>
           <c:showPercent val="0"/>
           <c:showBubbleSize val="0"/>
-          <c:showLeaderLines val="1"/>
         </c:dLbls>
+        <c:gapWidth val="150"/>
         <c:axId val="-2068027336"/>
         <c:axId val="-2113994440"/>
       </c:barChart>
@@ -733,6 +967,7 @@
         </c:scaling>
         <c:delete val="0"/>
         <c:axPos val="b"/>
+        <c:numFmt formatCode="General" sourceLinked="0"/>
         <c:majorTickMark val="out"/>
         <c:minorTickMark val="none"/>
         <c:tickLblPos val="nextTo"/>
@@ -755,6 +990,7 @@
                 <a:latin typeface="Calibri"/>
               </a:defRPr>
             </a:pPr>
+            <a:endParaRPr lang="en-US"/>
           </a:p>
         </c:txPr>
         <c:crossAx val="-2113994440"/>
@@ -767,12 +1003,14 @@
       <c:valAx>
         <c:axId val="-2113994440"/>
         <c:scaling>
+          <c:orientation val="minMax"/>
           <c:max val="1.05"/>
           <c:min val="0.5"/>
         </c:scaling>
         <c:delete val="0"/>
         <c:axPos val="l"/>
         <c:majorGridlines/>
+        <c:numFmt formatCode="General" sourceLinked="1"/>
         <c:majorTickMark val="out"/>
         <c:minorTickMark val="none"/>
         <c:tickLblPos val="nextTo"/>
@@ -795,10 +1033,12 @@
                 <a:latin typeface="Calibri"/>
               </a:defRPr>
             </a:pPr>
+            <a:endParaRPr lang="en-US"/>
           </a:p>
         </c:txPr>
         <c:crossAx val="-2068027336"/>
         <c:crosses val="autoZero"/>
+        <c:crossBetween val="between"/>
       </c:valAx>
     </c:plotArea>
     <c:legend>
@@ -816,10 +1056,13 @@
               <a:latin typeface="Calibri"/>
             </a:defRPr>
           </a:pPr>
+          <a:endParaRPr lang="en-US"/>
         </a:p>
       </c:txPr>
     </c:legend>
+    <c:plotVisOnly val="1"/>
     <c:dispBlanksAs val="gap"/>
+    <c:showDLblsOverMax val="1"/>
   </c:chart>
   <c:txPr>
     <a:bodyPr/>
@@ -875,10 +1118,9 @@
           <a:lstStyle/>
           <a:p>
             <a:r>
-              <a:rPr lang="en-US" smtClean="0"/>
+              <a:rPr lang="en-US"/>
               <a:t>Click to edit Master title style</a:t>
             </a:r>
-            <a:endParaRPr lang="en-US"/>
           </a:p>
         </p:txBody>
       </p:sp>
@@ -994,10 +1236,9 @@
           </a:lstStyle>
           <a:p>
             <a:r>
-              <a:rPr lang="en-US" smtClean="0"/>
+              <a:rPr lang="en-US"/>
               <a:t>Click to edit Master subtitle style</a:t>
             </a:r>
-            <a:endParaRPr lang="en-US"/>
           </a:p>
         </p:txBody>
       </p:sp>
@@ -1018,7 +1259,7 @@
           <a:p>
             <a:fld id="{5BCAD085-E8A6-8845-BD4E-CB4CCA059FC4}" type="datetimeFigureOut">
               <a:rPr lang="en-US" smtClean="0"/>
-              <a:t>1/27/13</a:t>
+              <a:t>5/24/2026</a:t>
             </a:fld>
             <a:endParaRPr lang="en-US"/>
           </a:p>
@@ -1112,10 +1353,9 @@
           <a:lstStyle/>
           <a:p>
             <a:r>
-              <a:rPr lang="en-US" smtClean="0"/>
+              <a:rPr lang="en-US"/>
               <a:t>Click to edit Master title style</a:t>
             </a:r>
-            <a:endParaRPr lang="en-US"/>
           </a:p>
         </p:txBody>
       </p:sp>
@@ -1136,38 +1376,37 @@
           <a:p>
             <a:pPr lvl="0"/>
             <a:r>
-              <a:rPr lang="en-US" smtClean="0"/>
+              <a:rPr lang="en-US"/>
               <a:t>Click to edit Master text styles</a:t>
             </a:r>
           </a:p>
           <a:p>
             <a:pPr lvl="1"/>
             <a:r>
-              <a:rPr lang="en-US" smtClean="0"/>
+              <a:rPr lang="en-US"/>
               <a:t>Second level</a:t>
             </a:r>
           </a:p>
           <a:p>
             <a:pPr lvl="2"/>
             <a:r>
-              <a:rPr lang="en-US" smtClean="0"/>
+              <a:rPr lang="en-US"/>
               <a:t>Third level</a:t>
             </a:r>
           </a:p>
           <a:p>
             <a:pPr lvl="3"/>
             <a:r>
-              <a:rPr lang="en-US" smtClean="0"/>
+              <a:rPr lang="en-US"/>
               <a:t>Fourth level</a:t>
             </a:r>
           </a:p>
           <a:p>
             <a:pPr lvl="4"/>
             <a:r>
-              <a:rPr lang="en-US" smtClean="0"/>
+              <a:rPr lang="en-US"/>
               <a:t>Fifth level</a:t>
             </a:r>
-            <a:endParaRPr lang="en-US"/>
           </a:p>
         </p:txBody>
       </p:sp>
@@ -1188,7 +1427,7 @@
           <a:p>
             <a:fld id="{5BCAD085-E8A6-8845-BD4E-CB4CCA059FC4}" type="datetimeFigureOut">
               <a:rPr lang="en-US" smtClean="0"/>
-              <a:t>1/27/13</a:t>
+              <a:t>5/24/2026</a:t>
             </a:fld>
             <a:endParaRPr lang="en-US"/>
           </a:p>
@@ -1287,10 +1526,9 @@
           <a:lstStyle/>
           <a:p>
             <a:r>
-              <a:rPr lang="en-US" smtClean="0"/>
+              <a:rPr lang="en-US"/>
               <a:t>Click to edit Master title style</a:t>
             </a:r>
-            <a:endParaRPr lang="en-US"/>
           </a:p>
         </p:txBody>
       </p:sp>
@@ -1316,38 +1554,37 @@
           <a:p>
             <a:pPr lvl="0"/>
             <a:r>
-              <a:rPr lang="en-US" smtClean="0"/>
+              <a:rPr lang="en-US"/>
               <a:t>Click to edit Master text styles</a:t>
             </a:r>
           </a:p>
           <a:p>
             <a:pPr lvl="1"/>
             <a:r>
-              <a:rPr lang="en-US" smtClean="0"/>
+              <a:rPr lang="en-US"/>
               <a:t>Second level</a:t>
             </a:r>
           </a:p>
           <a:p>
             <a:pPr lvl="2"/>
             <a:r>
-              <a:rPr lang="en-US" smtClean="0"/>
+              <a:rPr lang="en-US"/>
               <a:t>Third level</a:t>
             </a:r>
           </a:p>
           <a:p>
             <a:pPr lvl="3"/>
             <a:r>
-              <a:rPr lang="en-US" smtClean="0"/>
+              <a:rPr lang="en-US"/>
               <a:t>Fourth level</a:t>
             </a:r>
           </a:p>
           <a:p>
             <a:pPr lvl="4"/>
             <a:r>
-              <a:rPr lang="en-US" smtClean="0"/>
+              <a:rPr lang="en-US"/>
               <a:t>Fifth level</a:t>
             </a:r>
-            <a:endParaRPr lang="en-US"/>
           </a:p>
         </p:txBody>
       </p:sp>
@@ -1368,7 +1605,7 @@
           <a:p>
             <a:fld id="{5BCAD085-E8A6-8845-BD4E-CB4CCA059FC4}" type="datetimeFigureOut">
               <a:rPr lang="en-US" smtClean="0"/>
-              <a:t>1/27/13</a:t>
+              <a:t>5/24/2026</a:t>
             </a:fld>
             <a:endParaRPr lang="en-US"/>
           </a:p>
@@ -1462,10 +1699,9 @@
           <a:lstStyle/>
           <a:p>
             <a:r>
-              <a:rPr lang="en-US" smtClean="0"/>
+              <a:rPr lang="en-US"/>
               <a:t>Click to edit Master title style</a:t>
             </a:r>
-            <a:endParaRPr lang="en-US"/>
           </a:p>
         </p:txBody>
       </p:sp>
@@ -1486,38 +1722,37 @@
           <a:p>
             <a:pPr lvl="0"/>
             <a:r>
-              <a:rPr lang="en-US" smtClean="0"/>
+              <a:rPr lang="en-US"/>
               <a:t>Click to edit Master text styles</a:t>
             </a:r>
           </a:p>
           <a:p>
             <a:pPr lvl="1"/>
             <a:r>
-              <a:rPr lang="en-US" smtClean="0"/>
+              <a:rPr lang="en-US"/>
               <a:t>Second level</a:t>
             </a:r>
           </a:p>
           <a:p>
             <a:pPr lvl="2"/>
             <a:r>
-              <a:rPr lang="en-US" smtClean="0"/>
+              <a:rPr lang="en-US"/>
               <a:t>Third level</a:t>
             </a:r>
           </a:p>
           <a:p>
             <a:pPr lvl="3"/>
             <a:r>
-              <a:rPr lang="en-US" smtClean="0"/>
+              <a:rPr lang="en-US"/>
               <a:t>Fourth level</a:t>
             </a:r>
           </a:p>
           <a:p>
             <a:pPr lvl="4"/>
             <a:r>
-              <a:rPr lang="en-US" smtClean="0"/>
+              <a:rPr lang="en-US"/>
               <a:t>Fifth level</a:t>
             </a:r>
-            <a:endParaRPr lang="en-US"/>
           </a:p>
         </p:txBody>
       </p:sp>
@@ -1538,7 +1773,7 @@
           <a:p>
             <a:fld id="{5BCAD085-E8A6-8845-BD4E-CB4CCA059FC4}" type="datetimeFigureOut">
               <a:rPr lang="en-US" smtClean="0"/>
-              <a:t>1/27/13</a:t>
+              <a:t>5/24/2026</a:t>
             </a:fld>
             <a:endParaRPr lang="en-US"/>
           </a:p>
@@ -1641,10 +1876,9 @@
           </a:lstStyle>
           <a:p>
             <a:r>
-              <a:rPr lang="en-US" smtClean="0"/>
+              <a:rPr lang="en-US"/>
               <a:t>Click to edit Master title style</a:t>
             </a:r>
-            <a:endParaRPr lang="en-US"/>
           </a:p>
         </p:txBody>
       </p:sp>
@@ -1761,7 +1995,7 @@
           <a:p>
             <a:pPr lvl="0"/>
             <a:r>
-              <a:rPr lang="en-US" smtClean="0"/>
+              <a:rPr lang="en-US"/>
               <a:t>Click to edit Master text styles</a:t>
             </a:r>
           </a:p>
@@ -1784,7 +2018,7 @@
           <a:p>
             <a:fld id="{5BCAD085-E8A6-8845-BD4E-CB4CCA059FC4}" type="datetimeFigureOut">
               <a:rPr lang="en-US" smtClean="0"/>
-              <a:t>1/27/13</a:t>
+              <a:t>5/24/2026</a:t>
             </a:fld>
             <a:endParaRPr lang="en-US"/>
           </a:p>
@@ -1878,10 +2112,9 @@
           <a:lstStyle/>
           <a:p>
             <a:r>
-              <a:rPr lang="en-US" smtClean="0"/>
+              <a:rPr lang="en-US"/>
               <a:t>Click to edit Master title style</a:t>
             </a:r>
-            <a:endParaRPr lang="en-US"/>
           </a:p>
         </p:txBody>
       </p:sp>
@@ -1935,38 +2168,37 @@
           <a:p>
             <a:pPr lvl="0"/>
             <a:r>
-              <a:rPr lang="en-US" smtClean="0"/>
+              <a:rPr lang="en-US"/>
               <a:t>Click to edit Master text styles</a:t>
             </a:r>
           </a:p>
           <a:p>
             <a:pPr lvl="1"/>
             <a:r>
-              <a:rPr lang="en-US" smtClean="0"/>
+              <a:rPr lang="en-US"/>
               <a:t>Second level</a:t>
             </a:r>
           </a:p>
           <a:p>
             <a:pPr lvl="2"/>
             <a:r>
-              <a:rPr lang="en-US" smtClean="0"/>
+              <a:rPr lang="en-US"/>
               <a:t>Third level</a:t>
             </a:r>
           </a:p>
           <a:p>
             <a:pPr lvl="3"/>
             <a:r>
-              <a:rPr lang="en-US" smtClean="0"/>
+              <a:rPr lang="en-US"/>
               <a:t>Fourth level</a:t>
             </a:r>
           </a:p>
           <a:p>
             <a:pPr lvl="4"/>
             <a:r>
-              <a:rPr lang="en-US" smtClean="0"/>
+              <a:rPr lang="en-US"/>
               <a:t>Fifth level</a:t>
             </a:r>
-            <a:endParaRPr lang="en-US"/>
           </a:p>
         </p:txBody>
       </p:sp>
@@ -2020,38 +2252,37 @@
           <a:p>
             <a:pPr lvl="0"/>
             <a:r>
-              <a:rPr lang="en-US" smtClean="0"/>
+              <a:rPr lang="en-US"/>
               <a:t>Click to edit Master text styles</a:t>
             </a:r>
           </a:p>
           <a:p>
             <a:pPr lvl="1"/>
             <a:r>
-              <a:rPr lang="en-US" smtClean="0"/>
+              <a:rPr lang="en-US"/>
               <a:t>Second level</a:t>
             </a:r>
           </a:p>
           <a:p>
             <a:pPr lvl="2"/>
             <a:r>
-              <a:rPr lang="en-US" smtClean="0"/>
+              <a:rPr lang="en-US"/>
               <a:t>Third level</a:t>
             </a:r>
           </a:p>
           <a:p>
             <a:pPr lvl="3"/>
             <a:r>
-              <a:rPr lang="en-US" smtClean="0"/>
+              <a:rPr lang="en-US"/>
               <a:t>Fourth level</a:t>
             </a:r>
           </a:p>
           <a:p>
             <a:pPr lvl="4"/>
             <a:r>
-              <a:rPr lang="en-US" smtClean="0"/>
+              <a:rPr lang="en-US"/>
               <a:t>Fifth level</a:t>
             </a:r>
-            <a:endParaRPr lang="en-US"/>
           </a:p>
         </p:txBody>
       </p:sp>
@@ -2072,7 +2303,7 @@
           <a:p>
             <a:fld id="{5BCAD085-E8A6-8845-BD4E-CB4CCA059FC4}" type="datetimeFigureOut">
               <a:rPr lang="en-US" smtClean="0"/>
-              <a:t>1/27/13</a:t>
+              <a:t>5/24/2026</a:t>
             </a:fld>
             <a:endParaRPr lang="en-US"/>
           </a:p>
@@ -2170,10 +2401,9 @@
           </a:lstStyle>
           <a:p>
             <a:r>
-              <a:rPr lang="en-US" smtClean="0"/>
+              <a:rPr lang="en-US"/>
               <a:t>Click to edit Master title style</a:t>
             </a:r>
-            <a:endParaRPr lang="en-US"/>
           </a:p>
         </p:txBody>
       </p:sp>
@@ -2236,7 +2466,7 @@
           <a:p>
             <a:pPr lvl="0"/>
             <a:r>
-              <a:rPr lang="en-US" smtClean="0"/>
+              <a:rPr lang="en-US"/>
               <a:t>Click to edit Master text styles</a:t>
             </a:r>
           </a:p>
@@ -2292,38 +2522,37 @@
           <a:p>
             <a:pPr lvl="0"/>
             <a:r>
-              <a:rPr lang="en-US" smtClean="0"/>
+              <a:rPr lang="en-US"/>
               <a:t>Click to edit Master text styles</a:t>
             </a:r>
           </a:p>
           <a:p>
             <a:pPr lvl="1"/>
             <a:r>
-              <a:rPr lang="en-US" smtClean="0"/>
+              <a:rPr lang="en-US"/>
               <a:t>Second level</a:t>
             </a:r>
           </a:p>
           <a:p>
             <a:pPr lvl="2"/>
             <a:r>
-              <a:rPr lang="en-US" smtClean="0"/>
+              <a:rPr lang="en-US"/>
               <a:t>Third level</a:t>
             </a:r>
           </a:p>
           <a:p>
             <a:pPr lvl="3"/>
             <a:r>
-              <a:rPr lang="en-US" smtClean="0"/>
+              <a:rPr lang="en-US"/>
               <a:t>Fourth level</a:t>
             </a:r>
           </a:p>
           <a:p>
             <a:pPr lvl="4"/>
             <a:r>
-              <a:rPr lang="en-US" smtClean="0"/>
+              <a:rPr lang="en-US"/>
               <a:t>Fifth level</a:t>
             </a:r>
-            <a:endParaRPr lang="en-US"/>
           </a:p>
         </p:txBody>
       </p:sp>
@@ -2386,7 +2615,7 @@
           <a:p>
             <a:pPr lvl="0"/>
             <a:r>
-              <a:rPr lang="en-US" smtClean="0"/>
+              <a:rPr lang="en-US"/>
               <a:t>Click to edit Master text styles</a:t>
             </a:r>
           </a:p>
@@ -2442,38 +2671,37 @@
           <a:p>
             <a:pPr lvl="0"/>
             <a:r>
-              <a:rPr lang="en-US" smtClean="0"/>
+              <a:rPr lang="en-US"/>
               <a:t>Click to edit Master text styles</a:t>
             </a:r>
           </a:p>
           <a:p>
             <a:pPr lvl="1"/>
             <a:r>
-              <a:rPr lang="en-US" smtClean="0"/>
+              <a:rPr lang="en-US"/>
               <a:t>Second level</a:t>
             </a:r>
           </a:p>
           <a:p>
             <a:pPr lvl="2"/>
             <a:r>
-              <a:rPr lang="en-US" smtClean="0"/>
+              <a:rPr lang="en-US"/>
               <a:t>Third level</a:t>
             </a:r>
           </a:p>
           <a:p>
             <a:pPr lvl="3"/>
             <a:r>
-              <a:rPr lang="en-US" smtClean="0"/>
+              <a:rPr lang="en-US"/>
               <a:t>Fourth level</a:t>
             </a:r>
           </a:p>
           <a:p>
             <a:pPr lvl="4"/>
             <a:r>
-              <a:rPr lang="en-US" smtClean="0"/>
+              <a:rPr lang="en-US"/>
               <a:t>Fifth level</a:t>
             </a:r>
-            <a:endParaRPr lang="en-US"/>
           </a:p>
         </p:txBody>
       </p:sp>
@@ -2494,7 +2722,7 @@
           <a:p>
             <a:fld id="{5BCAD085-E8A6-8845-BD4E-CB4CCA059FC4}" type="datetimeFigureOut">
               <a:rPr lang="en-US" smtClean="0"/>
-              <a:t>1/27/13</a:t>
+              <a:t>5/24/2026</a:t>
             </a:fld>
             <a:endParaRPr lang="en-US"/>
           </a:p>
@@ -2588,10 +2816,9 @@
           <a:lstStyle/>
           <a:p>
             <a:r>
-              <a:rPr lang="en-US" smtClean="0"/>
+              <a:rPr lang="en-US"/>
               <a:t>Click to edit Master title style</a:t>
             </a:r>
-            <a:endParaRPr lang="en-US"/>
           </a:p>
         </p:txBody>
       </p:sp>
@@ -2612,7 +2839,7 @@
           <a:p>
             <a:fld id="{5BCAD085-E8A6-8845-BD4E-CB4CCA059FC4}" type="datetimeFigureOut">
               <a:rPr lang="en-US" smtClean="0"/>
-              <a:t>1/27/13</a:t>
+              <a:t>5/24/2026</a:t>
             </a:fld>
             <a:endParaRPr lang="en-US"/>
           </a:p>
@@ -2707,7 +2934,7 @@
           <a:p>
             <a:fld id="{5BCAD085-E8A6-8845-BD4E-CB4CCA059FC4}" type="datetimeFigureOut">
               <a:rPr lang="en-US" smtClean="0"/>
-              <a:t>1/27/13</a:t>
+              <a:t>5/24/2026</a:t>
             </a:fld>
             <a:endParaRPr lang="en-US"/>
           </a:p>
@@ -2810,10 +3037,9 @@
           </a:lstStyle>
           <a:p>
             <a:r>
-              <a:rPr lang="en-US" smtClean="0"/>
+              <a:rPr lang="en-US"/>
               <a:t>Click to edit Master title style</a:t>
             </a:r>
-            <a:endParaRPr lang="en-US"/>
           </a:p>
         </p:txBody>
       </p:sp>
@@ -2867,38 +3093,37 @@
           <a:p>
             <a:pPr lvl="0"/>
             <a:r>
-              <a:rPr lang="en-US" smtClean="0"/>
+              <a:rPr lang="en-US"/>
               <a:t>Click to edit Master text styles</a:t>
             </a:r>
           </a:p>
           <a:p>
             <a:pPr lvl="1"/>
             <a:r>
-              <a:rPr lang="en-US" smtClean="0"/>
+              <a:rPr lang="en-US"/>
               <a:t>Second level</a:t>
             </a:r>
           </a:p>
           <a:p>
             <a:pPr lvl="2"/>
             <a:r>
-              <a:rPr lang="en-US" smtClean="0"/>
+              <a:rPr lang="en-US"/>
               <a:t>Third level</a:t>
             </a:r>
           </a:p>
           <a:p>
             <a:pPr lvl="3"/>
             <a:r>
-              <a:rPr lang="en-US" smtClean="0"/>
+              <a:rPr lang="en-US"/>
               <a:t>Fourth level</a:t>
             </a:r>
           </a:p>
           <a:p>
             <a:pPr lvl="4"/>
             <a:r>
-              <a:rPr lang="en-US" smtClean="0"/>
+              <a:rPr lang="en-US"/>
               <a:t>Fifth level</a:t>
             </a:r>
-            <a:endParaRPr lang="en-US"/>
           </a:p>
         </p:txBody>
       </p:sp>
@@ -2961,7 +3186,7 @@
           <a:p>
             <a:pPr lvl="0"/>
             <a:r>
-              <a:rPr lang="en-US" smtClean="0"/>
+              <a:rPr lang="en-US"/>
               <a:t>Click to edit Master text styles</a:t>
             </a:r>
           </a:p>
@@ -2984,7 +3209,7 @@
           <a:p>
             <a:fld id="{5BCAD085-E8A6-8845-BD4E-CB4CCA059FC4}" type="datetimeFigureOut">
               <a:rPr lang="en-US" smtClean="0"/>
-              <a:t>1/27/13</a:t>
+              <a:t>5/24/2026</a:t>
             </a:fld>
             <a:endParaRPr lang="en-US"/>
           </a:p>
@@ -3087,10 +3312,9 @@
           </a:lstStyle>
           <a:p>
             <a:r>
-              <a:rPr lang="en-US" smtClean="0"/>
+              <a:rPr lang="en-US"/>
               <a:t>Click to edit Master title style</a:t>
             </a:r>
-            <a:endParaRPr lang="en-US"/>
           </a:p>
         </p:txBody>
       </p:sp>
@@ -3214,7 +3438,7 @@
           <a:p>
             <a:pPr lvl="0"/>
             <a:r>
-              <a:rPr lang="en-US" smtClean="0"/>
+              <a:rPr lang="en-US"/>
               <a:t>Click to edit Master text styles</a:t>
             </a:r>
           </a:p>
@@ -3237,7 +3461,7 @@
           <a:p>
             <a:fld id="{5BCAD085-E8A6-8845-BD4E-CB4CCA059FC4}" type="datetimeFigureOut">
               <a:rPr lang="en-US" smtClean="0"/>
-              <a:t>1/27/13</a:t>
+              <a:t>5/24/2026</a:t>
             </a:fld>
             <a:endParaRPr lang="en-US"/>
           </a:p>
@@ -3346,10 +3570,9 @@
           <a:lstStyle/>
           <a:p>
             <a:r>
-              <a:rPr lang="en-US" smtClean="0"/>
+              <a:rPr lang="en-US"/>
               <a:t>Click to edit Master title style</a:t>
             </a:r>
-            <a:endParaRPr lang="en-US"/>
           </a:p>
         </p:txBody>
       </p:sp>
@@ -3380,38 +3603,37 @@
           <a:p>
             <a:pPr lvl="0"/>
             <a:r>
-              <a:rPr lang="en-US" smtClean="0"/>
+              <a:rPr lang="en-US"/>
               <a:t>Click to edit Master text styles</a:t>
             </a:r>
           </a:p>
           <a:p>
             <a:pPr lvl="1"/>
             <a:r>
-              <a:rPr lang="en-US" smtClean="0"/>
+              <a:rPr lang="en-US"/>
               <a:t>Second level</a:t>
             </a:r>
           </a:p>
           <a:p>
             <a:pPr lvl="2"/>
             <a:r>
-              <a:rPr lang="en-US" smtClean="0"/>
+              <a:rPr lang="en-US"/>
               <a:t>Third level</a:t>
             </a:r>
           </a:p>
           <a:p>
             <a:pPr lvl="3"/>
             <a:r>
-              <a:rPr lang="en-US" smtClean="0"/>
+              <a:rPr lang="en-US"/>
               <a:t>Fourth level</a:t>
             </a:r>
           </a:p>
           <a:p>
             <a:pPr lvl="4"/>
             <a:r>
-              <a:rPr lang="en-US" smtClean="0"/>
+              <a:rPr lang="en-US"/>
               <a:t>Fifth level</a:t>
             </a:r>
-            <a:endParaRPr lang="en-US"/>
           </a:p>
         </p:txBody>
       </p:sp>
@@ -3450,7 +3672,7 @@
           <a:p>
             <a:fld id="{5BCAD085-E8A6-8845-BD4E-CB4CCA059FC4}" type="datetimeFigureOut">
               <a:rPr lang="en-US" smtClean="0"/>
-              <a:t>1/27/13</a:t>
+              <a:t>5/24/2026</a:t>
             </a:fld>
             <a:endParaRPr lang="en-US"/>
           </a:p>
@@ -3809,7 +4031,7 @@
 </file>
 
 <file path=ppt/slides/slide1.xml><?xml version="1.0" encoding="utf-8"?>
-<p:sld xmlns:a="http://schemas.openxmlformats.org/drawingml/2006/main" xmlns:p="http://schemas.openxmlformats.org/presentationml/2006/main" xmlns:r="http://schemas.openxmlformats.org/officeDocument/2006/relationships">
+<p:sld xmlns:a="http://schemas.openxmlformats.org/drawingml/2006/main" xmlns:r="http://schemas.openxmlformats.org/officeDocument/2006/relationships" xmlns:p="http://schemas.openxmlformats.org/presentationml/2006/main">
   <p:cSld>
     <p:spTree>
       <p:nvGrpSpPr>
@@ -3817,7 +4039,14 @@
         <p:cNvGrpSpPr/>
         <p:nvPr/>
       </p:nvGrpSpPr>
-      <p:grpSpPr/>
+      <p:grpSpPr>
+        <a:xfrm>
+          <a:off x="0" y="0"/>
+          <a:ext cx="0" cy="0"/>
+          <a:chOff x="0" y="0"/>
+          <a:chExt cx="0" cy="0"/>
+        </a:xfrm>
+      </p:grpSpPr>
       <p:sp>
         <p:nvSpPr>
           <p:cNvPr id="2" name="Rectangle 1"/>
@@ -3858,6 +4087,7 @@
           <a:lstStyle/>
           <a:p>
             <a:pPr algn="ctr"/>
+            <a:endParaRPr/>
           </a:p>
         </p:txBody>
       </p:sp>
@@ -3878,7 +4108,7 @@
           <a:noFill/>
         </p:spPr>
         <p:txBody>
-          <a:bodyPr wrap="square" anchor="t" lIns="0" rIns="0" tIns="0" bIns="0">
+          <a:bodyPr wrap="square" lIns="0" tIns="0" rIns="0" bIns="0" anchor="t">
             <a:spAutoFit/>
           </a:bodyPr>
           <a:lstStyle/>
@@ -3913,7 +4143,7 @@
           <a:noFill/>
         </p:spPr>
         <p:txBody>
-          <a:bodyPr wrap="square" anchor="t" lIns="0" rIns="0" tIns="0" bIns="0">
+          <a:bodyPr wrap="square" lIns="0" tIns="0" rIns="0" bIns="0" anchor="t">
             <a:spAutoFit/>
           </a:bodyPr>
           <a:lstStyle/>
@@ -3948,7 +4178,7 @@
           <a:noFill/>
         </p:spPr>
         <p:txBody>
-          <a:bodyPr wrap="square" anchor="t" lIns="0" rIns="0" tIns="0" bIns="0">
+          <a:bodyPr wrap="square" lIns="0" tIns="0" rIns="0" bIns="0" anchor="t">
             <a:spAutoFit/>
           </a:bodyPr>
           <a:lstStyle/>
@@ -3983,7 +4213,7 @@
           <a:noFill/>
         </p:spPr>
         <p:txBody>
-          <a:bodyPr wrap="square" anchor="t" lIns="0" rIns="0" tIns="0" bIns="0">
+          <a:bodyPr wrap="square" lIns="0" tIns="0" rIns="0" bIns="0" anchor="t">
             <a:spAutoFit/>
           </a:bodyPr>
           <a:lstStyle/>
@@ -4018,7 +4248,7 @@
           <a:noFill/>
         </p:spPr>
         <p:txBody>
-          <a:bodyPr wrap="square" anchor="t" lIns="0" rIns="0" tIns="0" bIns="0">
+          <a:bodyPr wrap="square" lIns="0" tIns="0" rIns="0" bIns="0" anchor="t">
             <a:spAutoFit/>
           </a:bodyPr>
           <a:lstStyle/>
@@ -4045,7 +4275,7 @@
 </file>
 
 <file path=ppt/slides/slide10.xml><?xml version="1.0" encoding="utf-8"?>
-<p:sld xmlns:a="http://schemas.openxmlformats.org/drawingml/2006/main" xmlns:p="http://schemas.openxmlformats.org/presentationml/2006/main" xmlns:r="http://schemas.openxmlformats.org/officeDocument/2006/relationships">
+<p:sld xmlns:a="http://schemas.openxmlformats.org/drawingml/2006/main" xmlns:r="http://schemas.openxmlformats.org/officeDocument/2006/relationships" xmlns:p="http://schemas.openxmlformats.org/presentationml/2006/main">
   <p:cSld>
     <p:spTree>
       <p:nvGrpSpPr>
@@ -4053,7 +4283,14 @@
         <p:cNvGrpSpPr/>
         <p:nvPr/>
       </p:nvGrpSpPr>
-      <p:grpSpPr/>
+      <p:grpSpPr>
+        <a:xfrm>
+          <a:off x="0" y="0"/>
+          <a:ext cx="0" cy="0"/>
+          <a:chOff x="0" y="0"/>
+          <a:chExt cx="0" cy="0"/>
+        </a:xfrm>
+      </p:grpSpPr>
       <p:sp>
         <p:nvSpPr>
           <p:cNvPr id="2" name="TextBox 1"/>
@@ -4071,7 +4308,7 @@
           <a:noFill/>
         </p:spPr>
         <p:txBody>
-          <a:bodyPr wrap="square" anchor="t" lIns="0" rIns="0" tIns="0" bIns="0">
+          <a:bodyPr wrap="square" lIns="0" tIns="0" rIns="0" bIns="0" anchor="t">
             <a:spAutoFit/>
           </a:bodyPr>
           <a:lstStyle/>
@@ -4112,9 +4349,27 @@
                 <a:tableStyleId>{5C22544A-7EE6-4342-B048-85BDC9FD1C3A}</a:tableStyleId>
               </a:tblPr>
               <a:tblGrid>
-                <a:gridCol w="6858000"/>
-                <a:gridCol w="2103120"/>
-                <a:gridCol w="2103120"/>
+                <a:gridCol w="6858000">
+                  <a:extLst>
+                    <a:ext uri="{9D8B030D-6E8A-4147-A177-3AD203B41FA5}">
+                      <a16:colId xmlns:a16="http://schemas.microsoft.com/office/drawing/2014/main" val="20000"/>
+                    </a:ext>
+                  </a:extLst>
+                </a:gridCol>
+                <a:gridCol w="2103120">
+                  <a:extLst>
+                    <a:ext uri="{9D8B030D-6E8A-4147-A177-3AD203B41FA5}">
+                      <a16:colId xmlns:a16="http://schemas.microsoft.com/office/drawing/2014/main" val="20001"/>
+                    </a:ext>
+                  </a:extLst>
+                </a:gridCol>
+                <a:gridCol w="2103120">
+                  <a:extLst>
+                    <a:ext uri="{9D8B030D-6E8A-4147-A177-3AD203B41FA5}">
+                      <a16:colId xmlns:a16="http://schemas.microsoft.com/office/drawing/2014/main" val="20002"/>
+                    </a:ext>
+                  </a:extLst>
+                </a:gridCol>
               </a:tblGrid>
               <a:tr h="457200">
                 <a:tc>
@@ -4186,6 +4441,11 @@
                     </a:solidFill>
                   </a:tcPr>
                 </a:tc>
+                <a:extLst>
+                  <a:ext uri="{0D108BD9-81ED-4DB2-BD59-A6C34878D82A}">
+                    <a16:rowId xmlns:a16="http://schemas.microsoft.com/office/drawing/2014/main" val="10000"/>
+                  </a:ext>
+                </a:extLst>
               </a:tr>
               <a:tr h="457200">
                 <a:tc>
@@ -4257,6 +4517,11 @@
                     </a:solidFill>
                   </a:tcPr>
                 </a:tc>
+                <a:extLst>
+                  <a:ext uri="{0D108BD9-81ED-4DB2-BD59-A6C34878D82A}">
+                    <a16:rowId xmlns:a16="http://schemas.microsoft.com/office/drawing/2014/main" val="10001"/>
+                  </a:ext>
+                </a:extLst>
               </a:tr>
               <a:tr h="457200">
                 <a:tc>
@@ -4328,6 +4593,11 @@
                     </a:solidFill>
                   </a:tcPr>
                 </a:tc>
+                <a:extLst>
+                  <a:ext uri="{0D108BD9-81ED-4DB2-BD59-A6C34878D82A}">
+                    <a16:rowId xmlns:a16="http://schemas.microsoft.com/office/drawing/2014/main" val="10002"/>
+                  </a:ext>
+                </a:extLst>
               </a:tr>
               <a:tr h="457200">
                 <a:tc>
@@ -4399,6 +4669,11 @@
                     </a:solidFill>
                   </a:tcPr>
                 </a:tc>
+                <a:extLst>
+                  <a:ext uri="{0D108BD9-81ED-4DB2-BD59-A6C34878D82A}">
+                    <a16:rowId xmlns:a16="http://schemas.microsoft.com/office/drawing/2014/main" val="10003"/>
+                  </a:ext>
+                </a:extLst>
               </a:tr>
               <a:tr h="457200">
                 <a:tc>
@@ -4470,6 +4745,11 @@
                     </a:solidFill>
                   </a:tcPr>
                 </a:tc>
+                <a:extLst>
+                  <a:ext uri="{0D108BD9-81ED-4DB2-BD59-A6C34878D82A}">
+                    <a16:rowId xmlns:a16="http://schemas.microsoft.com/office/drawing/2014/main" val="10004"/>
+                  </a:ext>
+                </a:extLst>
               </a:tr>
               <a:tr h="457200">
                 <a:tc>
@@ -4541,6 +4821,11 @@
                     </a:solidFill>
                   </a:tcPr>
                 </a:tc>
+                <a:extLst>
+                  <a:ext uri="{0D108BD9-81ED-4DB2-BD59-A6C34878D82A}">
+                    <a16:rowId xmlns:a16="http://schemas.microsoft.com/office/drawing/2014/main" val="10005"/>
+                  </a:ext>
+                </a:extLst>
               </a:tr>
               <a:tr h="457200">
                 <a:tc>
@@ -4612,6 +4897,11 @@
                     </a:solidFill>
                   </a:tcPr>
                 </a:tc>
+                <a:extLst>
+                  <a:ext uri="{0D108BD9-81ED-4DB2-BD59-A6C34878D82A}">
+                    <a16:rowId xmlns:a16="http://schemas.microsoft.com/office/drawing/2014/main" val="10006"/>
+                  </a:ext>
+                </a:extLst>
               </a:tr>
               <a:tr h="457200">
                 <a:tc>
@@ -4683,6 +4973,11 @@
                     </a:solidFill>
                   </a:tcPr>
                 </a:tc>
+                <a:extLst>
+                  <a:ext uri="{0D108BD9-81ED-4DB2-BD59-A6C34878D82A}">
+                    <a16:rowId xmlns:a16="http://schemas.microsoft.com/office/drawing/2014/main" val="10007"/>
+                  </a:ext>
+                </a:extLst>
               </a:tr>
             </a:tbl>
           </a:graphicData>
@@ -4705,7 +5000,7 @@
           <a:noFill/>
         </p:spPr>
         <p:txBody>
-          <a:bodyPr wrap="square" anchor="t" lIns="0" rIns="0" tIns="0" bIns="0">
+          <a:bodyPr wrap="square" lIns="0" tIns="0" rIns="0" bIns="0" anchor="t">
             <a:spAutoFit/>
           </a:bodyPr>
           <a:lstStyle/>
@@ -4744,7 +5039,7 @@
           <a:noFill/>
         </p:spPr>
         <p:txBody>
-          <a:bodyPr wrap="square" anchor="t" lIns="0" rIns="0" tIns="0" bIns="0">
+          <a:bodyPr wrap="square" lIns="0" tIns="0" rIns="0" bIns="0" anchor="t">
             <a:spAutoFit/>
           </a:bodyPr>
           <a:lstStyle/>
@@ -4771,7 +5066,7 @@
 </file>
 
 <file path=ppt/slides/slide11.xml><?xml version="1.0" encoding="utf-8"?>
-<p:sld xmlns:a="http://schemas.openxmlformats.org/drawingml/2006/main" xmlns:p="http://schemas.openxmlformats.org/presentationml/2006/main" xmlns:r="http://schemas.openxmlformats.org/officeDocument/2006/relationships">
+<p:sld xmlns:a="http://schemas.openxmlformats.org/drawingml/2006/main" xmlns:r="http://schemas.openxmlformats.org/officeDocument/2006/relationships" xmlns:p="http://schemas.openxmlformats.org/presentationml/2006/main">
   <p:cSld>
     <p:spTree>
       <p:nvGrpSpPr>
@@ -4779,7 +5074,14 @@
         <p:cNvGrpSpPr/>
         <p:nvPr/>
       </p:nvGrpSpPr>
-      <p:grpSpPr/>
+      <p:grpSpPr>
+        <a:xfrm>
+          <a:off x="0" y="0"/>
+          <a:ext cx="0" cy="0"/>
+          <a:chOff x="0" y="0"/>
+          <a:chExt cx="0" cy="0"/>
+        </a:xfrm>
+      </p:grpSpPr>
       <p:sp>
         <p:nvSpPr>
           <p:cNvPr id="2" name="TextBox 1"/>
@@ -4797,7 +5099,7 @@
           <a:noFill/>
         </p:spPr>
         <p:txBody>
-          <a:bodyPr wrap="square" anchor="t" lIns="0" rIns="0" tIns="0" bIns="0">
+          <a:bodyPr wrap="square" lIns="0" tIns="0" rIns="0" bIns="0" anchor="t">
             <a:spAutoFit/>
           </a:bodyPr>
           <a:lstStyle/>
@@ -4836,7 +5138,7 @@
           <a:noFill/>
         </p:spPr>
         <p:txBody>
-          <a:bodyPr wrap="square" anchor="t" lIns="0" rIns="0" tIns="0" bIns="0">
+          <a:bodyPr wrap="square" lIns="0" tIns="0" rIns="0" bIns="0" anchor="t">
             <a:spAutoFit/>
           </a:bodyPr>
           <a:lstStyle/>
@@ -4899,7 +5201,7 @@
           <a:noFill/>
         </p:spPr>
         <p:txBody>
-          <a:bodyPr wrap="square" anchor="t" lIns="0" rIns="0" tIns="0" bIns="0">
+          <a:bodyPr wrap="square" lIns="0" tIns="0" rIns="0" bIns="0" anchor="t">
             <a:spAutoFit/>
           </a:bodyPr>
           <a:lstStyle/>
@@ -4926,7 +5228,7 @@
 </file>
 
 <file path=ppt/slides/slide12.xml><?xml version="1.0" encoding="utf-8"?>
-<p:sld xmlns:a="http://schemas.openxmlformats.org/drawingml/2006/main" xmlns:p="http://schemas.openxmlformats.org/presentationml/2006/main" xmlns:r="http://schemas.openxmlformats.org/officeDocument/2006/relationships">
+<p:sld xmlns:a="http://schemas.openxmlformats.org/drawingml/2006/main" xmlns:r="http://schemas.openxmlformats.org/officeDocument/2006/relationships" xmlns:p="http://schemas.openxmlformats.org/presentationml/2006/main">
   <p:cSld>
     <p:spTree>
       <p:nvGrpSpPr>
@@ -4934,7 +5236,14 @@
         <p:cNvGrpSpPr/>
         <p:nvPr/>
       </p:nvGrpSpPr>
-      <p:grpSpPr/>
+      <p:grpSpPr>
+        <a:xfrm>
+          <a:off x="0" y="0"/>
+          <a:ext cx="0" cy="0"/>
+          <a:chOff x="0" y="0"/>
+          <a:chExt cx="0" cy="0"/>
+        </a:xfrm>
+      </p:grpSpPr>
       <p:sp>
         <p:nvSpPr>
           <p:cNvPr id="2" name="TextBox 1"/>
@@ -4952,7 +5261,7 @@
           <a:noFill/>
         </p:spPr>
         <p:txBody>
-          <a:bodyPr wrap="square" anchor="t" lIns="0" rIns="0" tIns="0" bIns="0">
+          <a:bodyPr wrap="square" lIns="0" tIns="0" rIns="0" bIns="0" anchor="t">
             <a:spAutoFit/>
           </a:bodyPr>
           <a:lstStyle/>
@@ -4991,7 +5300,7 @@
           <a:noFill/>
         </p:spPr>
         <p:txBody>
-          <a:bodyPr wrap="square" anchor="t" lIns="0" rIns="0" tIns="0" bIns="0">
+          <a:bodyPr wrap="square" lIns="0" tIns="0" rIns="0" bIns="0" anchor="t">
             <a:spAutoFit/>
           </a:bodyPr>
           <a:lstStyle/>
@@ -5030,7 +5339,7 @@
           <a:noFill/>
         </p:spPr>
         <p:txBody>
-          <a:bodyPr wrap="square" anchor="t" lIns="0" rIns="0" tIns="0" bIns="0">
+          <a:bodyPr wrap="square" lIns="0" tIns="0" rIns="0" bIns="0" anchor="t">
             <a:spAutoFit/>
           </a:bodyPr>
           <a:lstStyle/>
@@ -5065,7 +5374,7 @@
           <a:noFill/>
         </p:spPr>
         <p:txBody>
-          <a:bodyPr wrap="square" anchor="t" lIns="0" rIns="0" tIns="0" bIns="0">
+          <a:bodyPr wrap="square" lIns="0" tIns="0" rIns="0" bIns="0" anchor="t">
             <a:spAutoFit/>
           </a:bodyPr>
           <a:lstStyle/>
@@ -5104,7 +5413,7 @@
           <a:noFill/>
         </p:spPr>
         <p:txBody>
-          <a:bodyPr wrap="square" anchor="t" lIns="0" rIns="0" tIns="0" bIns="0">
+          <a:bodyPr wrap="square" lIns="0" tIns="0" rIns="0" bIns="0" anchor="t">
             <a:spAutoFit/>
           </a:bodyPr>
           <a:lstStyle/>
@@ -5139,7 +5448,7 @@
           <a:noFill/>
         </p:spPr>
         <p:txBody>
-          <a:bodyPr wrap="square" anchor="t" lIns="0" rIns="0" tIns="0" bIns="0">
+          <a:bodyPr wrap="square" lIns="0" tIns="0" rIns="0" bIns="0" anchor="t">
             <a:spAutoFit/>
           </a:bodyPr>
           <a:lstStyle/>
@@ -5178,7 +5487,7 @@
           <a:noFill/>
         </p:spPr>
         <p:txBody>
-          <a:bodyPr wrap="square" anchor="t" lIns="0" rIns="0" tIns="0" bIns="0">
+          <a:bodyPr wrap="square" lIns="0" tIns="0" rIns="0" bIns="0" anchor="t">
             <a:spAutoFit/>
           </a:bodyPr>
           <a:lstStyle/>
@@ -5213,7 +5522,7 @@
           <a:noFill/>
         </p:spPr>
         <p:txBody>
-          <a:bodyPr wrap="square" anchor="t" lIns="0" rIns="0" tIns="0" bIns="0">
+          <a:bodyPr wrap="square" lIns="0" tIns="0" rIns="0" bIns="0" anchor="t">
             <a:spAutoFit/>
           </a:bodyPr>
           <a:lstStyle/>
@@ -5252,7 +5561,7 @@
           <a:noFill/>
         </p:spPr>
         <p:txBody>
-          <a:bodyPr wrap="square" anchor="t" lIns="0" rIns="0" tIns="0" bIns="0">
+          <a:bodyPr wrap="square" lIns="0" tIns="0" rIns="0" bIns="0" anchor="t">
             <a:spAutoFit/>
           </a:bodyPr>
           <a:lstStyle/>
@@ -5287,7 +5596,7 @@
           <a:noFill/>
         </p:spPr>
         <p:txBody>
-          <a:bodyPr wrap="square" anchor="t" lIns="0" rIns="0" tIns="0" bIns="0">
+          <a:bodyPr wrap="square" lIns="0" tIns="0" rIns="0" bIns="0" anchor="t">
             <a:spAutoFit/>
           </a:bodyPr>
           <a:lstStyle/>
@@ -5326,7 +5635,7 @@
           <a:noFill/>
         </p:spPr>
         <p:txBody>
-          <a:bodyPr wrap="square" anchor="t" lIns="0" rIns="0" tIns="0" bIns="0">
+          <a:bodyPr wrap="square" lIns="0" tIns="0" rIns="0" bIns="0" anchor="t">
             <a:spAutoFit/>
           </a:bodyPr>
           <a:lstStyle/>
@@ -5353,7 +5662,7 @@
 </file>
 
 <file path=ppt/slides/slide13.xml><?xml version="1.0" encoding="utf-8"?>
-<p:sld xmlns:a="http://schemas.openxmlformats.org/drawingml/2006/main" xmlns:p="http://schemas.openxmlformats.org/presentationml/2006/main" xmlns:r="http://schemas.openxmlformats.org/officeDocument/2006/relationships">
+<p:sld xmlns:a="http://schemas.openxmlformats.org/drawingml/2006/main" xmlns:r="http://schemas.openxmlformats.org/officeDocument/2006/relationships" xmlns:p="http://schemas.openxmlformats.org/presentationml/2006/main">
   <p:cSld>
     <p:spTree>
       <p:nvGrpSpPr>
@@ -5361,7 +5670,14 @@
         <p:cNvGrpSpPr/>
         <p:nvPr/>
       </p:nvGrpSpPr>
-      <p:grpSpPr/>
+      <p:grpSpPr>
+        <a:xfrm>
+          <a:off x="0" y="0"/>
+          <a:ext cx="0" cy="0"/>
+          <a:chOff x="0" y="0"/>
+          <a:chExt cx="0" cy="0"/>
+        </a:xfrm>
+      </p:grpSpPr>
       <p:sp>
         <p:nvSpPr>
           <p:cNvPr id="2" name="TextBox 1"/>
@@ -5379,7 +5695,7 @@
           <a:noFill/>
         </p:spPr>
         <p:txBody>
-          <a:bodyPr wrap="square" anchor="t" lIns="0" rIns="0" tIns="0" bIns="0">
+          <a:bodyPr wrap="square" lIns="0" tIns="0" rIns="0" bIns="0" anchor="t">
             <a:spAutoFit/>
           </a:bodyPr>
           <a:lstStyle/>
@@ -5418,7 +5734,7 @@
           <a:noFill/>
         </p:spPr>
         <p:txBody>
-          <a:bodyPr wrap="square" anchor="t" lIns="0" rIns="0" tIns="0" bIns="0">
+          <a:bodyPr wrap="square" lIns="0" tIns="0" rIns="0" bIns="0" anchor="t">
             <a:spAutoFit/>
           </a:bodyPr>
           <a:lstStyle/>
@@ -5457,7 +5773,7 @@
           <a:noFill/>
         </p:spPr>
         <p:txBody>
-          <a:bodyPr wrap="square" anchor="t" lIns="0" rIns="0" tIns="0" bIns="0">
+          <a:bodyPr wrap="square" lIns="0" tIns="0" rIns="0" bIns="0" anchor="t">
             <a:spAutoFit/>
           </a:bodyPr>
           <a:lstStyle/>
@@ -5492,7 +5808,7 @@
           <a:noFill/>
         </p:spPr>
         <p:txBody>
-          <a:bodyPr wrap="square" anchor="t" lIns="0" rIns="0" tIns="0" bIns="0">
+          <a:bodyPr wrap="square" lIns="0" tIns="0" rIns="0" bIns="0" anchor="t">
             <a:spAutoFit/>
           </a:bodyPr>
           <a:lstStyle/>
@@ -5527,7 +5843,7 @@
           <a:noFill/>
         </p:spPr>
         <p:txBody>
-          <a:bodyPr wrap="square" anchor="t" lIns="0" rIns="0" tIns="0" bIns="0">
+          <a:bodyPr wrap="square" lIns="0" tIns="0" rIns="0" bIns="0" anchor="t">
             <a:spAutoFit/>
           </a:bodyPr>
           <a:lstStyle/>
@@ -5562,7 +5878,7 @@
           <a:noFill/>
         </p:spPr>
         <p:txBody>
-          <a:bodyPr wrap="square" anchor="t" lIns="0" rIns="0" tIns="0" bIns="0">
+          <a:bodyPr wrap="square" lIns="0" tIns="0" rIns="0" bIns="0" anchor="t">
             <a:spAutoFit/>
           </a:bodyPr>
           <a:lstStyle/>
@@ -5597,7 +5913,7 @@
           <a:noFill/>
         </p:spPr>
         <p:txBody>
-          <a:bodyPr wrap="square" anchor="t" lIns="0" rIns="0" tIns="0" bIns="0">
+          <a:bodyPr wrap="square" lIns="0" tIns="0" rIns="0" bIns="0" anchor="t">
             <a:spAutoFit/>
           </a:bodyPr>
           <a:lstStyle/>
@@ -5632,7 +5948,7 @@
           <a:noFill/>
         </p:spPr>
         <p:txBody>
-          <a:bodyPr wrap="square" anchor="t" lIns="0" rIns="0" tIns="0" bIns="0">
+          <a:bodyPr wrap="square" lIns="0" tIns="0" rIns="0" bIns="0" anchor="t">
             <a:spAutoFit/>
           </a:bodyPr>
           <a:lstStyle/>
@@ -5667,7 +5983,7 @@
           <a:noFill/>
         </p:spPr>
         <p:txBody>
-          <a:bodyPr wrap="square" anchor="t" lIns="0" rIns="0" tIns="0" bIns="0">
+          <a:bodyPr wrap="square" lIns="0" tIns="0" rIns="0" bIns="0" anchor="t">
             <a:spAutoFit/>
           </a:bodyPr>
           <a:lstStyle/>
@@ -5702,7 +6018,7 @@
           <a:noFill/>
         </p:spPr>
         <p:txBody>
-          <a:bodyPr wrap="square" anchor="t" lIns="0" rIns="0" tIns="0" bIns="0">
+          <a:bodyPr wrap="square" lIns="0" tIns="0" rIns="0" bIns="0" anchor="t">
             <a:spAutoFit/>
           </a:bodyPr>
           <a:lstStyle/>
@@ -5737,7 +6053,7 @@
           <a:noFill/>
         </p:spPr>
         <p:txBody>
-          <a:bodyPr wrap="square" anchor="t" lIns="0" rIns="0" tIns="0" bIns="0">
+          <a:bodyPr wrap="square" lIns="0" tIns="0" rIns="0" bIns="0" anchor="t">
             <a:spAutoFit/>
           </a:bodyPr>
           <a:lstStyle/>
@@ -5773,7 +6089,7 @@
         </p:xfrm>
         <a:graphic>
           <a:graphicData uri="http://schemas.openxmlformats.org/drawingml/2006/chart">
-            <c:chart xmlns:c="http://schemas.openxmlformats.org/drawingml/2006/chart" r:id="rId2"/>
+            <c:chart xmlns:c="http://schemas.openxmlformats.org/drawingml/2006/chart" xmlns:r="http://schemas.openxmlformats.org/officeDocument/2006/relationships" r:id="rId2"/>
           </a:graphicData>
         </a:graphic>
       </p:graphicFrame>
@@ -5794,7 +6110,7 @@
           <a:noFill/>
         </p:spPr>
         <p:txBody>
-          <a:bodyPr wrap="square" anchor="t" lIns="0" rIns="0" tIns="0" bIns="0">
+          <a:bodyPr wrap="square" lIns="0" tIns="0" rIns="0" bIns="0" anchor="t">
             <a:spAutoFit/>
           </a:bodyPr>
           <a:lstStyle/>
@@ -5833,7 +6149,7 @@
           <a:noFill/>
         </p:spPr>
         <p:txBody>
-          <a:bodyPr wrap="square" anchor="t" lIns="0" rIns="0" tIns="0" bIns="0">
+          <a:bodyPr wrap="square" lIns="0" tIns="0" rIns="0" bIns="0" anchor="t">
             <a:spAutoFit/>
           </a:bodyPr>
           <a:lstStyle/>
@@ -5860,7 +6176,7 @@
 </file>
 
 <file path=ppt/slides/slide14.xml><?xml version="1.0" encoding="utf-8"?>
-<p:sld xmlns:a="http://schemas.openxmlformats.org/drawingml/2006/main" xmlns:p="http://schemas.openxmlformats.org/presentationml/2006/main" xmlns:r="http://schemas.openxmlformats.org/officeDocument/2006/relationships">
+<p:sld xmlns:a="http://schemas.openxmlformats.org/drawingml/2006/main" xmlns:r="http://schemas.openxmlformats.org/officeDocument/2006/relationships" xmlns:p="http://schemas.openxmlformats.org/presentationml/2006/main">
   <p:cSld>
     <p:spTree>
       <p:nvGrpSpPr>
@@ -5868,7 +6184,14 @@
         <p:cNvGrpSpPr/>
         <p:nvPr/>
       </p:nvGrpSpPr>
-      <p:grpSpPr/>
+      <p:grpSpPr>
+        <a:xfrm>
+          <a:off x="0" y="0"/>
+          <a:ext cx="0" cy="0"/>
+          <a:chOff x="0" y="0"/>
+          <a:chExt cx="0" cy="0"/>
+        </a:xfrm>
+      </p:grpSpPr>
       <p:sp>
         <p:nvSpPr>
           <p:cNvPr id="2" name="TextBox 1"/>
@@ -5886,7 +6209,7 @@
           <a:noFill/>
         </p:spPr>
         <p:txBody>
-          <a:bodyPr wrap="square" anchor="t" lIns="0" rIns="0" tIns="0" bIns="0">
+          <a:bodyPr wrap="square" lIns="0" tIns="0" rIns="0" bIns="0" anchor="t">
             <a:spAutoFit/>
           </a:bodyPr>
           <a:lstStyle/>
@@ -5916,8 +6239,8 @@
         </p:nvSpPr>
         <p:spPr>
           <a:xfrm>
-            <a:off x="548640" y="1097280"/>
-            <a:ext cx="11064240" cy="457200"/>
+            <a:off x="6546850" y="1097280"/>
+            <a:ext cx="5066030" cy="2361865"/>
           </a:xfrm>
           <a:prstGeom prst="rect">
             <a:avLst/>
@@ -5925,7 +6248,7 @@
           <a:noFill/>
         </p:spPr>
         <p:txBody>
-          <a:bodyPr wrap="square" anchor="t" lIns="0" rIns="0" tIns="0" bIns="0">
+          <a:bodyPr wrap="square" lIns="0" tIns="0" rIns="0" bIns="0" anchor="t">
             <a:spAutoFit/>
           </a:bodyPr>
           <a:lstStyle/>
@@ -5936,7 +6259,7 @@
               </a:lnSpc>
             </a:pPr>
             <a:r>
-              <a:rPr sz="1300" b="0" i="1">
+              <a:rPr sz="2400" b="0" i="1" dirty="0">
                 <a:solidFill>
                   <a:srgbClr val="707070"/>
                 </a:solidFill>
@@ -5963,8 +6286,8 @@
         </p:blipFill>
         <p:spPr>
           <a:xfrm>
-            <a:off x="3337560" y="1828800"/>
-            <a:ext cx="5486400" cy="4572000"/>
+            <a:off x="0" y="1097279"/>
+            <a:ext cx="5930900" cy="4942417"/>
           </a:xfrm>
           <a:prstGeom prst="rect">
             <a:avLst/>
@@ -5988,7 +6311,7 @@
           <a:noFill/>
         </p:spPr>
         <p:txBody>
-          <a:bodyPr wrap="square" anchor="t" lIns="0" rIns="0" tIns="0" bIns="0">
+          <a:bodyPr wrap="square" lIns="0" tIns="0" rIns="0" bIns="0" anchor="t">
             <a:spAutoFit/>
           </a:bodyPr>
           <a:lstStyle/>
@@ -6015,7 +6338,7 @@
 </file>
 
 <file path=ppt/slides/slide15.xml><?xml version="1.0" encoding="utf-8"?>
-<p:sld xmlns:a="http://schemas.openxmlformats.org/drawingml/2006/main" xmlns:p="http://schemas.openxmlformats.org/presentationml/2006/main" xmlns:r="http://schemas.openxmlformats.org/officeDocument/2006/relationships">
+<p:sld xmlns:a="http://schemas.openxmlformats.org/drawingml/2006/main" xmlns:r="http://schemas.openxmlformats.org/officeDocument/2006/relationships" xmlns:p="http://schemas.openxmlformats.org/presentationml/2006/main">
   <p:cSld>
     <p:spTree>
       <p:nvGrpSpPr>
@@ -6023,7 +6346,14 @@
         <p:cNvGrpSpPr/>
         <p:nvPr/>
       </p:nvGrpSpPr>
-      <p:grpSpPr/>
+      <p:grpSpPr>
+        <a:xfrm>
+          <a:off x="0" y="0"/>
+          <a:ext cx="0" cy="0"/>
+          <a:chOff x="0" y="0"/>
+          <a:chExt cx="0" cy="0"/>
+        </a:xfrm>
+      </p:grpSpPr>
       <p:sp>
         <p:nvSpPr>
           <p:cNvPr id="2" name="TextBox 1"/>
@@ -6041,7 +6371,7 @@
           <a:noFill/>
         </p:spPr>
         <p:txBody>
-          <a:bodyPr wrap="square" anchor="t" lIns="0" rIns="0" tIns="0" bIns="0">
+          <a:bodyPr wrap="square" lIns="0" tIns="0" rIns="0" bIns="0" anchor="t">
             <a:spAutoFit/>
           </a:bodyPr>
           <a:lstStyle/>
@@ -6071,8 +6401,8 @@
         </p:nvSpPr>
         <p:spPr>
           <a:xfrm>
-            <a:off x="548640" y="1097280"/>
-            <a:ext cx="11064240" cy="457200"/>
+            <a:off x="5924550" y="1471374"/>
+            <a:ext cx="5218430" cy="2361865"/>
           </a:xfrm>
           <a:prstGeom prst="rect">
             <a:avLst/>
@@ -6080,7 +6410,7 @@
           <a:noFill/>
         </p:spPr>
         <p:txBody>
-          <a:bodyPr wrap="square" anchor="t" lIns="0" rIns="0" tIns="0" bIns="0">
+          <a:bodyPr wrap="square" lIns="0" tIns="0" rIns="0" bIns="0" anchor="t">
             <a:spAutoFit/>
           </a:bodyPr>
           <a:lstStyle/>
@@ -6091,13 +6421,49 @@
               </a:lnSpc>
             </a:pPr>
             <a:r>
-              <a:rPr sz="1300" b="0" i="1">
+              <a:rPr sz="2400" b="0" i="1" dirty="0">
                 <a:solidFill>
                   <a:srgbClr val="707070"/>
                 </a:solidFill>
                 <a:latin typeface="Calibri"/>
               </a:rPr>
-              <a:t>Canonical 4-class HistGradientBoosting. DITTO leads, MetaRNN second, then population allele frequencies — the model is using both predictor scores and frequency data.</a:t>
+              <a:t>Canonical 4-class </a:t>
+            </a:r>
+            <a:r>
+              <a:rPr sz="2400" b="0" i="1" dirty="0" err="1">
+                <a:solidFill>
+                  <a:srgbClr val="707070"/>
+                </a:solidFill>
+                <a:latin typeface="Calibri"/>
+              </a:rPr>
+              <a:t>HistGradientBoosting</a:t>
+            </a:r>
+            <a:r>
+              <a:rPr sz="2400" b="0" i="1" dirty="0">
+                <a:solidFill>
+                  <a:srgbClr val="707070"/>
+                </a:solidFill>
+                <a:latin typeface="Calibri"/>
+              </a:rPr>
+              <a:t>. DITTO leads, </a:t>
+            </a:r>
+            <a:r>
+              <a:rPr sz="2400" b="0" i="1" dirty="0" err="1">
+                <a:solidFill>
+                  <a:srgbClr val="707070"/>
+                </a:solidFill>
+                <a:latin typeface="Calibri"/>
+              </a:rPr>
+              <a:t>MetaRNN</a:t>
+            </a:r>
+            <a:r>
+              <a:rPr sz="2400" b="0" i="1" dirty="0">
+                <a:solidFill>
+                  <a:srgbClr val="707070"/>
+                </a:solidFill>
+                <a:latin typeface="Calibri"/>
+              </a:rPr>
+              <a:t> second, then population allele frequencies — the model is using both predictor scores and frequency data.</a:t>
             </a:r>
           </a:p>
         </p:txBody>
@@ -6118,8 +6484,8 @@
         </p:blipFill>
         <p:spPr>
           <a:xfrm>
-            <a:off x="4048760" y="1828800"/>
-            <a:ext cx="4064000" cy="4572000"/>
+            <a:off x="397510" y="1102995"/>
+            <a:ext cx="4790440" cy="5389245"/>
           </a:xfrm>
           <a:prstGeom prst="rect">
             <a:avLst/>
@@ -6143,7 +6509,7 @@
           <a:noFill/>
         </p:spPr>
         <p:txBody>
-          <a:bodyPr wrap="square" anchor="t" lIns="0" rIns="0" tIns="0" bIns="0">
+          <a:bodyPr wrap="square" lIns="0" tIns="0" rIns="0" bIns="0" anchor="t">
             <a:spAutoFit/>
           </a:bodyPr>
           <a:lstStyle/>
@@ -6170,7 +6536,7 @@
 </file>
 
 <file path=ppt/slides/slide16.xml><?xml version="1.0" encoding="utf-8"?>
-<p:sld xmlns:a="http://schemas.openxmlformats.org/drawingml/2006/main" xmlns:p="http://schemas.openxmlformats.org/presentationml/2006/main" xmlns:r="http://schemas.openxmlformats.org/officeDocument/2006/relationships">
+<p:sld xmlns:a="http://schemas.openxmlformats.org/drawingml/2006/main" xmlns:r="http://schemas.openxmlformats.org/officeDocument/2006/relationships" xmlns:p="http://schemas.openxmlformats.org/presentationml/2006/main">
   <p:cSld>
     <p:spTree>
       <p:nvGrpSpPr>
@@ -6178,7 +6544,14 @@
         <p:cNvGrpSpPr/>
         <p:nvPr/>
       </p:nvGrpSpPr>
-      <p:grpSpPr/>
+      <p:grpSpPr>
+        <a:xfrm>
+          <a:off x="0" y="0"/>
+          <a:ext cx="0" cy="0"/>
+          <a:chOff x="0" y="0"/>
+          <a:chExt cx="0" cy="0"/>
+        </a:xfrm>
+      </p:grpSpPr>
       <p:sp>
         <p:nvSpPr>
           <p:cNvPr id="2" name="TextBox 1"/>
@@ -6196,7 +6569,7 @@
           <a:noFill/>
         </p:spPr>
         <p:txBody>
-          <a:bodyPr wrap="square" anchor="t" lIns="0" rIns="0" tIns="0" bIns="0">
+          <a:bodyPr wrap="square" lIns="0" tIns="0" rIns="0" bIns="0" anchor="t">
             <a:spAutoFit/>
           </a:bodyPr>
           <a:lstStyle/>
@@ -6214,45 +6587,6 @@
                 <a:latin typeface="Georgia"/>
               </a:rPr>
               <a:t>Predictor correlation — the redundancy structure</a:t>
-            </a:r>
-          </a:p>
-        </p:txBody>
-      </p:sp>
-      <p:sp>
-        <p:nvSpPr>
-          <p:cNvPr id="3" name="TextBox 2"/>
-          <p:cNvSpPr txBox="1"/>
-          <p:nvPr/>
-        </p:nvSpPr>
-        <p:spPr>
-          <a:xfrm>
-            <a:off x="548640" y="1371600"/>
-            <a:ext cx="11064240" cy="640080"/>
-          </a:xfrm>
-          <a:prstGeom prst="rect">
-            <a:avLst/>
-          </a:prstGeom>
-          <a:noFill/>
-        </p:spPr>
-        <p:txBody>
-          <a:bodyPr wrap="square" anchor="t" lIns="0" rIns="0" tIns="0" bIns="0">
-            <a:spAutoFit/>
-          </a:bodyPr>
-          <a:lstStyle/>
-          <a:p>
-            <a:pPr algn="l">
-              <a:lnSpc>
-                <a:spcPct val="130000"/>
-              </a:lnSpc>
-            </a:pPr>
-            <a:r>
-              <a:rPr sz="1300" b="0" i="1">
-                <a:solidFill>
-                  <a:srgbClr val="707070"/>
-                </a:solidFill>
-                <a:latin typeface="Calibri"/>
-              </a:rPr>
-              <a:t>Pearson correlation among key VEP scores + gnomAD AF. Predictor scores form a tight cluster; gnomAD AF sits in its own corner — the structural reason predictors substitute for each other, but population AF does not.</a:t>
             </a:r>
           </a:p>
         </p:txBody>
@@ -6273,8 +6607,8 @@
         </p:blipFill>
         <p:spPr>
           <a:xfrm>
-            <a:off x="4023360" y="2286000"/>
-            <a:ext cx="4114800" cy="4114800"/>
+            <a:off x="0" y="848360"/>
+            <a:ext cx="6009640" cy="6009640"/>
           </a:xfrm>
           <a:prstGeom prst="rect">
             <a:avLst/>
@@ -6298,7 +6632,7 @@
           <a:noFill/>
         </p:spPr>
         <p:txBody>
-          <a:bodyPr wrap="square" anchor="t" lIns="0" rIns="0" tIns="0" bIns="0">
+          <a:bodyPr wrap="square" lIns="0" tIns="0" rIns="0" bIns="0" anchor="t">
             <a:spAutoFit/>
           </a:bodyPr>
           <a:lstStyle/>
@@ -6312,6 +6646,81 @@
                 <a:latin typeface="Calibri"/>
               </a:rPr>
               <a:t>16 / 21</a:t>
+            </a:r>
+          </a:p>
+        </p:txBody>
+      </p:sp>
+      <p:sp>
+        <p:nvSpPr>
+          <p:cNvPr id="3" name="TextBox 2"/>
+          <p:cNvSpPr txBox="1"/>
+          <p:nvPr/>
+        </p:nvSpPr>
+        <p:spPr>
+          <a:xfrm>
+            <a:off x="5731510" y="1631950"/>
+            <a:ext cx="5885180" cy="3315651"/>
+          </a:xfrm>
+          <a:prstGeom prst="rect">
+            <a:avLst/>
+          </a:prstGeom>
+          <a:noFill/>
+        </p:spPr>
+        <p:txBody>
+          <a:bodyPr wrap="square" lIns="0" tIns="0" rIns="0" bIns="0" anchor="t">
+            <a:spAutoFit/>
+          </a:bodyPr>
+          <a:lstStyle/>
+          <a:p>
+            <a:pPr>
+              <a:lnSpc>
+                <a:spcPct val="130000"/>
+              </a:lnSpc>
+            </a:pPr>
+            <a:r>
+              <a:rPr sz="2800" b="0" i="1" dirty="0">
+                <a:solidFill>
+                  <a:srgbClr val="707070"/>
+                </a:solidFill>
+                <a:latin typeface="Calibri"/>
+              </a:rPr>
+              <a:t>Pearson correlation among key VEP scores + </a:t>
+            </a:r>
+            <a:r>
+              <a:rPr sz="2800" b="0" i="1" dirty="0" err="1">
+                <a:solidFill>
+                  <a:srgbClr val="707070"/>
+                </a:solidFill>
+                <a:latin typeface="Calibri"/>
+              </a:rPr>
+              <a:t>gnomAD</a:t>
+            </a:r>
+            <a:r>
+              <a:rPr sz="2800" b="0" i="1" dirty="0">
+                <a:solidFill>
+                  <a:srgbClr val="707070"/>
+                </a:solidFill>
+                <a:latin typeface="Calibri"/>
+              </a:rPr>
+              <a:t> AF. Predictor scores form a tight cluster; </a:t>
+            </a:r>
+            <a:r>
+              <a:rPr sz="2800" b="0" i="1" dirty="0" err="1">
+                <a:solidFill>
+                  <a:srgbClr val="707070"/>
+                </a:solidFill>
+                <a:latin typeface="Calibri"/>
+              </a:rPr>
+              <a:t>gnomAD</a:t>
+            </a:r>
+            <a:r>
+              <a:rPr sz="2800" b="0" i="1" dirty="0">
+                <a:solidFill>
+                  <a:srgbClr val="707070"/>
+                </a:solidFill>
+                <a:latin typeface="Calibri"/>
+              </a:rPr>
+              <a:t> AF sits in its own corner — the structural reason predictors substitute for each other, but population AF does not.</a:t>
             </a:r>
           </a:p>
         </p:txBody>
@@ -6325,7 +6734,7 @@
 </file>
 
 <file path=ppt/slides/slide17.xml><?xml version="1.0" encoding="utf-8"?>
-<p:sld xmlns:a="http://schemas.openxmlformats.org/drawingml/2006/main" xmlns:p="http://schemas.openxmlformats.org/presentationml/2006/main" xmlns:r="http://schemas.openxmlformats.org/officeDocument/2006/relationships">
+<p:sld xmlns:a="http://schemas.openxmlformats.org/drawingml/2006/main" xmlns:r="http://schemas.openxmlformats.org/officeDocument/2006/relationships" xmlns:p="http://schemas.openxmlformats.org/presentationml/2006/main">
   <p:cSld>
     <p:spTree>
       <p:nvGrpSpPr>
@@ -6333,7 +6742,14 @@
         <p:cNvGrpSpPr/>
         <p:nvPr/>
       </p:nvGrpSpPr>
-      <p:grpSpPr/>
+      <p:grpSpPr>
+        <a:xfrm>
+          <a:off x="0" y="0"/>
+          <a:ext cx="0" cy="0"/>
+          <a:chOff x="0" y="0"/>
+          <a:chExt cx="0" cy="0"/>
+        </a:xfrm>
+      </p:grpSpPr>
       <p:sp>
         <p:nvSpPr>
           <p:cNvPr id="2" name="TextBox 1"/>
@@ -6351,7 +6767,7 @@
           <a:noFill/>
         </p:spPr>
         <p:txBody>
-          <a:bodyPr wrap="square" anchor="t" lIns="0" rIns="0" tIns="0" bIns="0">
+          <a:bodyPr wrap="square" lIns="0" tIns="0" rIns="0" bIns="0" anchor="t">
             <a:spAutoFit/>
           </a:bodyPr>
           <a:lstStyle/>
@@ -6392,12 +6808,48 @@
                 <a:tableStyleId>{5C22544A-7EE6-4342-B048-85BDC9FD1C3A}</a:tableStyleId>
               </a:tblPr>
               <a:tblGrid>
-                <a:gridCol w="3108960"/>
-                <a:gridCol w="1554480"/>
-                <a:gridCol w="1554480"/>
-                <a:gridCol w="1554480"/>
-                <a:gridCol w="1554480"/>
-                <a:gridCol w="1737360"/>
+                <a:gridCol w="3108960">
+                  <a:extLst>
+                    <a:ext uri="{9D8B030D-6E8A-4147-A177-3AD203B41FA5}">
+                      <a16:colId xmlns:a16="http://schemas.microsoft.com/office/drawing/2014/main" val="20000"/>
+                    </a:ext>
+                  </a:extLst>
+                </a:gridCol>
+                <a:gridCol w="1554480">
+                  <a:extLst>
+                    <a:ext uri="{9D8B030D-6E8A-4147-A177-3AD203B41FA5}">
+                      <a16:colId xmlns:a16="http://schemas.microsoft.com/office/drawing/2014/main" val="20001"/>
+                    </a:ext>
+                  </a:extLst>
+                </a:gridCol>
+                <a:gridCol w="1554480">
+                  <a:extLst>
+                    <a:ext uri="{9D8B030D-6E8A-4147-A177-3AD203B41FA5}">
+                      <a16:colId xmlns:a16="http://schemas.microsoft.com/office/drawing/2014/main" val="20002"/>
+                    </a:ext>
+                  </a:extLst>
+                </a:gridCol>
+                <a:gridCol w="1554480">
+                  <a:extLst>
+                    <a:ext uri="{9D8B030D-6E8A-4147-A177-3AD203B41FA5}">
+                      <a16:colId xmlns:a16="http://schemas.microsoft.com/office/drawing/2014/main" val="20003"/>
+                    </a:ext>
+                  </a:extLst>
+                </a:gridCol>
+                <a:gridCol w="1554480">
+                  <a:extLst>
+                    <a:ext uri="{9D8B030D-6E8A-4147-A177-3AD203B41FA5}">
+                      <a16:colId xmlns:a16="http://schemas.microsoft.com/office/drawing/2014/main" val="20004"/>
+                    </a:ext>
+                  </a:extLst>
+                </a:gridCol>
+                <a:gridCol w="1737360">
+                  <a:extLst>
+                    <a:ext uri="{9D8B030D-6E8A-4147-A177-3AD203B41FA5}">
+                      <a16:colId xmlns:a16="http://schemas.microsoft.com/office/drawing/2014/main" val="20005"/>
+                    </a:ext>
+                  </a:extLst>
+                </a:gridCol>
               </a:tblGrid>
               <a:tr h="329184">
                 <a:tc>
@@ -6417,7 +6869,7 @@
                       </a:r>
                     </a:p>
                   </a:txBody>
-                  <a:tcPr marL="91440" marR="91440" marT="27432" marB="27432">
+                  <a:tcPr marT="27432" marB="27432">
                     <a:solidFill>
                       <a:srgbClr val="E8E8E8"/>
                     </a:solidFill>
@@ -6440,7 +6892,7 @@
                       </a:r>
                     </a:p>
                   </a:txBody>
-                  <a:tcPr marL="91440" marR="91440" marT="27432" marB="27432">
+                  <a:tcPr marT="27432" marB="27432">
                     <a:solidFill>
                       <a:srgbClr val="E8E8E8"/>
                     </a:solidFill>
@@ -6463,7 +6915,7 @@
                       </a:r>
                     </a:p>
                   </a:txBody>
-                  <a:tcPr marL="91440" marR="91440" marT="27432" marB="27432">
+                  <a:tcPr marT="27432" marB="27432">
                     <a:solidFill>
                       <a:srgbClr val="E8E8E8"/>
                     </a:solidFill>
@@ -6486,7 +6938,7 @@
                       </a:r>
                     </a:p>
                   </a:txBody>
-                  <a:tcPr marL="91440" marR="91440" marT="27432" marB="27432">
+                  <a:tcPr marT="27432" marB="27432">
                     <a:solidFill>
                       <a:srgbClr val="E8E8E8"/>
                     </a:solidFill>
@@ -6509,7 +6961,7 @@
                       </a:r>
                     </a:p>
                   </a:txBody>
-                  <a:tcPr marL="91440" marR="91440" marT="27432" marB="27432">
+                  <a:tcPr marT="27432" marB="27432">
                     <a:solidFill>
                       <a:srgbClr val="E8E8E8"/>
                     </a:solidFill>
@@ -6532,12 +6984,17 @@
                       </a:r>
                     </a:p>
                   </a:txBody>
-                  <a:tcPr marL="91440" marR="91440" marT="27432" marB="27432">
+                  <a:tcPr marT="27432" marB="27432">
                     <a:solidFill>
                       <a:srgbClr val="E8E8E8"/>
                     </a:solidFill>
                   </a:tcPr>
                 </a:tc>
+                <a:extLst>
+                  <a:ext uri="{0D108BD9-81ED-4DB2-BD59-A6C34878D82A}">
+                    <a16:rowId xmlns:a16="http://schemas.microsoft.com/office/drawing/2014/main" val="10000"/>
+                  </a:ext>
+                </a:extLst>
               </a:tr>
               <a:tr h="329184">
                 <a:tc>
@@ -6557,7 +7014,7 @@
                       </a:r>
                     </a:p>
                   </a:txBody>
-                  <a:tcPr marL="91440" marR="91440" marT="27432" marB="27432">
+                  <a:tcPr marT="27432" marB="27432">
                     <a:solidFill>
                       <a:srgbClr val="FFFFFF"/>
                     </a:solidFill>
@@ -6580,7 +7037,7 @@
                       </a:r>
                     </a:p>
                   </a:txBody>
-                  <a:tcPr marL="91440" marR="91440" marT="27432" marB="27432">
+                  <a:tcPr marT="27432" marB="27432">
                     <a:solidFill>
                       <a:srgbClr val="FFFFFF"/>
                     </a:solidFill>
@@ -6603,7 +7060,7 @@
                       </a:r>
                     </a:p>
                   </a:txBody>
-                  <a:tcPr marL="91440" marR="91440" marT="27432" marB="27432">
+                  <a:tcPr marT="27432" marB="27432">
                     <a:solidFill>
                       <a:srgbClr val="FFFFFF"/>
                     </a:solidFill>
@@ -6626,7 +7083,7 @@
                       </a:r>
                     </a:p>
                   </a:txBody>
-                  <a:tcPr marL="91440" marR="91440" marT="27432" marB="27432">
+                  <a:tcPr marT="27432" marB="27432">
                     <a:solidFill>
                       <a:srgbClr val="FFFFFF"/>
                     </a:solidFill>
@@ -6649,7 +7106,7 @@
                       </a:r>
                     </a:p>
                   </a:txBody>
-                  <a:tcPr marL="91440" marR="91440" marT="27432" marB="27432">
+                  <a:tcPr marT="27432" marB="27432">
                     <a:solidFill>
                       <a:srgbClr val="FFFFFF"/>
                     </a:solidFill>
@@ -6672,12 +7129,17 @@
                       </a:r>
                     </a:p>
                   </a:txBody>
-                  <a:tcPr marL="91440" marR="91440" marT="27432" marB="27432">
+                  <a:tcPr marT="27432" marB="27432">
                     <a:solidFill>
                       <a:srgbClr val="FFFFFF"/>
                     </a:solidFill>
                   </a:tcPr>
                 </a:tc>
+                <a:extLst>
+                  <a:ext uri="{0D108BD9-81ED-4DB2-BD59-A6C34878D82A}">
+                    <a16:rowId xmlns:a16="http://schemas.microsoft.com/office/drawing/2014/main" val="10001"/>
+                  </a:ext>
+                </a:extLst>
               </a:tr>
               <a:tr h="329184">
                 <a:tc>
@@ -6697,7 +7159,7 @@
                       </a:r>
                     </a:p>
                   </a:txBody>
-                  <a:tcPr marL="91440" marR="91440" marT="27432" marB="27432">
+                  <a:tcPr marT="27432" marB="27432">
                     <a:solidFill>
                       <a:srgbClr val="FFFFFF"/>
                     </a:solidFill>
@@ -6720,7 +7182,7 @@
                       </a:r>
                     </a:p>
                   </a:txBody>
-                  <a:tcPr marL="91440" marR="91440" marT="27432" marB="27432">
+                  <a:tcPr marT="27432" marB="27432">
                     <a:solidFill>
                       <a:srgbClr val="FFFFFF"/>
                     </a:solidFill>
@@ -6743,7 +7205,7 @@
                       </a:r>
                     </a:p>
                   </a:txBody>
-                  <a:tcPr marL="91440" marR="91440" marT="27432" marB="27432">
+                  <a:tcPr marT="27432" marB="27432">
                     <a:solidFill>
                       <a:srgbClr val="FFFFFF"/>
                     </a:solidFill>
@@ -6766,7 +7228,7 @@
                       </a:r>
                     </a:p>
                   </a:txBody>
-                  <a:tcPr marL="91440" marR="91440" marT="27432" marB="27432">
+                  <a:tcPr marT="27432" marB="27432">
                     <a:solidFill>
                       <a:srgbClr val="FFFFFF"/>
                     </a:solidFill>
@@ -6789,7 +7251,7 @@
                       </a:r>
                     </a:p>
                   </a:txBody>
-                  <a:tcPr marL="91440" marR="91440" marT="27432" marB="27432">
+                  <a:tcPr marT="27432" marB="27432">
                     <a:solidFill>
                       <a:srgbClr val="FFFFFF"/>
                     </a:solidFill>
@@ -6812,12 +7274,17 @@
                       </a:r>
                     </a:p>
                   </a:txBody>
-                  <a:tcPr marL="91440" marR="91440" marT="27432" marB="27432">
+                  <a:tcPr marT="27432" marB="27432">
                     <a:solidFill>
                       <a:srgbClr val="FFFFFF"/>
                     </a:solidFill>
                   </a:tcPr>
                 </a:tc>
+                <a:extLst>
+                  <a:ext uri="{0D108BD9-81ED-4DB2-BD59-A6C34878D82A}">
+                    <a16:rowId xmlns:a16="http://schemas.microsoft.com/office/drawing/2014/main" val="10002"/>
+                  </a:ext>
+                </a:extLst>
               </a:tr>
               <a:tr h="329184">
                 <a:tc>
@@ -6837,7 +7304,7 @@
                       </a:r>
                     </a:p>
                   </a:txBody>
-                  <a:tcPr marL="91440" marR="91440" marT="27432" marB="27432">
+                  <a:tcPr marT="27432" marB="27432">
                     <a:solidFill>
                       <a:srgbClr val="FFFFFF"/>
                     </a:solidFill>
@@ -6860,7 +7327,7 @@
                       </a:r>
                     </a:p>
                   </a:txBody>
-                  <a:tcPr marL="91440" marR="91440" marT="27432" marB="27432">
+                  <a:tcPr marT="27432" marB="27432">
                     <a:solidFill>
                       <a:srgbClr val="FFFFFF"/>
                     </a:solidFill>
@@ -6883,7 +7350,7 @@
                       </a:r>
                     </a:p>
                   </a:txBody>
-                  <a:tcPr marL="91440" marR="91440" marT="27432" marB="27432">
+                  <a:tcPr marT="27432" marB="27432">
                     <a:solidFill>
                       <a:srgbClr val="FFFFFF"/>
                     </a:solidFill>
@@ -6906,7 +7373,7 @@
                       </a:r>
                     </a:p>
                   </a:txBody>
-                  <a:tcPr marL="91440" marR="91440" marT="27432" marB="27432">
+                  <a:tcPr marT="27432" marB="27432">
                     <a:solidFill>
                       <a:srgbClr val="FFFFFF"/>
                     </a:solidFill>
@@ -6929,7 +7396,7 @@
                       </a:r>
                     </a:p>
                   </a:txBody>
-                  <a:tcPr marL="91440" marR="91440" marT="27432" marB="27432">
+                  <a:tcPr marT="27432" marB="27432">
                     <a:solidFill>
                       <a:srgbClr val="FFFFFF"/>
                     </a:solidFill>
@@ -6952,12 +7419,17 @@
                       </a:r>
                     </a:p>
                   </a:txBody>
-                  <a:tcPr marL="91440" marR="91440" marT="27432" marB="27432">
+                  <a:tcPr marT="27432" marB="27432">
                     <a:solidFill>
                       <a:srgbClr val="FFFFFF"/>
                     </a:solidFill>
                   </a:tcPr>
                 </a:tc>
+                <a:extLst>
+                  <a:ext uri="{0D108BD9-81ED-4DB2-BD59-A6C34878D82A}">
+                    <a16:rowId xmlns:a16="http://schemas.microsoft.com/office/drawing/2014/main" val="10003"/>
+                  </a:ext>
+                </a:extLst>
               </a:tr>
               <a:tr h="329184">
                 <a:tc>
@@ -6977,7 +7449,7 @@
                       </a:r>
                     </a:p>
                   </a:txBody>
-                  <a:tcPr marL="91440" marR="91440" marT="27432" marB="27432">
+                  <a:tcPr marT="27432" marB="27432">
                     <a:solidFill>
                       <a:srgbClr val="FFFFFF"/>
                     </a:solidFill>
@@ -7000,7 +7472,7 @@
                       </a:r>
                     </a:p>
                   </a:txBody>
-                  <a:tcPr marL="91440" marR="91440" marT="27432" marB="27432">
+                  <a:tcPr marT="27432" marB="27432">
                     <a:solidFill>
                       <a:srgbClr val="FFFFFF"/>
                     </a:solidFill>
@@ -7023,7 +7495,7 @@
                       </a:r>
                     </a:p>
                   </a:txBody>
-                  <a:tcPr marL="91440" marR="91440" marT="27432" marB="27432">
+                  <a:tcPr marT="27432" marB="27432">
                     <a:solidFill>
                       <a:srgbClr val="FFFFFF"/>
                     </a:solidFill>
@@ -7046,7 +7518,7 @@
                       </a:r>
                     </a:p>
                   </a:txBody>
-                  <a:tcPr marL="91440" marR="91440" marT="27432" marB="27432">
+                  <a:tcPr marT="27432" marB="27432">
                     <a:solidFill>
                       <a:srgbClr val="FFFFFF"/>
                     </a:solidFill>
@@ -7069,7 +7541,7 @@
                       </a:r>
                     </a:p>
                   </a:txBody>
-                  <a:tcPr marL="91440" marR="91440" marT="27432" marB="27432">
+                  <a:tcPr marT="27432" marB="27432">
                     <a:solidFill>
                       <a:srgbClr val="FFFFFF"/>
                     </a:solidFill>
@@ -7092,12 +7564,17 @@
                       </a:r>
                     </a:p>
                   </a:txBody>
-                  <a:tcPr marL="91440" marR="91440" marT="27432" marB="27432">
+                  <a:tcPr marT="27432" marB="27432">
                     <a:solidFill>
                       <a:srgbClr val="FFFFFF"/>
                     </a:solidFill>
                   </a:tcPr>
                 </a:tc>
+                <a:extLst>
+                  <a:ext uri="{0D108BD9-81ED-4DB2-BD59-A6C34878D82A}">
+                    <a16:rowId xmlns:a16="http://schemas.microsoft.com/office/drawing/2014/main" val="10004"/>
+                  </a:ext>
+                </a:extLst>
               </a:tr>
               <a:tr h="329184">
                 <a:tc>
@@ -7117,7 +7594,7 @@
                       </a:r>
                     </a:p>
                   </a:txBody>
-                  <a:tcPr marL="91440" marR="91440" marT="27432" marB="27432">
+                  <a:tcPr marT="27432" marB="27432">
                     <a:solidFill>
                       <a:srgbClr val="FFFFFF"/>
                     </a:solidFill>
@@ -7140,7 +7617,7 @@
                       </a:r>
                     </a:p>
                   </a:txBody>
-                  <a:tcPr marL="91440" marR="91440" marT="27432" marB="27432">
+                  <a:tcPr marT="27432" marB="27432">
                     <a:solidFill>
                       <a:srgbClr val="FFFFFF"/>
                     </a:solidFill>
@@ -7163,7 +7640,7 @@
                       </a:r>
                     </a:p>
                   </a:txBody>
-                  <a:tcPr marL="91440" marR="91440" marT="27432" marB="27432">
+                  <a:tcPr marT="27432" marB="27432">
                     <a:solidFill>
                       <a:srgbClr val="FFFFFF"/>
                     </a:solidFill>
@@ -7186,7 +7663,7 @@
                       </a:r>
                     </a:p>
                   </a:txBody>
-                  <a:tcPr marL="91440" marR="91440" marT="27432" marB="27432">
+                  <a:tcPr marT="27432" marB="27432">
                     <a:solidFill>
                       <a:srgbClr val="FFFFFF"/>
                     </a:solidFill>
@@ -7209,7 +7686,7 @@
                       </a:r>
                     </a:p>
                   </a:txBody>
-                  <a:tcPr marL="91440" marR="91440" marT="27432" marB="27432">
+                  <a:tcPr marT="27432" marB="27432">
                     <a:solidFill>
                       <a:srgbClr val="FFFFFF"/>
                     </a:solidFill>
@@ -7232,12 +7709,17 @@
                       </a:r>
                     </a:p>
                   </a:txBody>
-                  <a:tcPr marL="91440" marR="91440" marT="27432" marB="27432">
+                  <a:tcPr marT="27432" marB="27432">
                     <a:solidFill>
                       <a:srgbClr val="FFFFFF"/>
                     </a:solidFill>
                   </a:tcPr>
                 </a:tc>
+                <a:extLst>
+                  <a:ext uri="{0D108BD9-81ED-4DB2-BD59-A6C34878D82A}">
+                    <a16:rowId xmlns:a16="http://schemas.microsoft.com/office/drawing/2014/main" val="10005"/>
+                  </a:ext>
+                </a:extLst>
               </a:tr>
               <a:tr h="329184">
                 <a:tc>
@@ -7257,7 +7739,7 @@
                       </a:r>
                     </a:p>
                   </a:txBody>
-                  <a:tcPr marL="91440" marR="91440" marT="27432" marB="27432">
+                  <a:tcPr marT="27432" marB="27432">
                     <a:solidFill>
                       <a:srgbClr val="FFFFFF"/>
                     </a:solidFill>
@@ -7280,7 +7762,7 @@
                       </a:r>
                     </a:p>
                   </a:txBody>
-                  <a:tcPr marL="91440" marR="91440" marT="27432" marB="27432">
+                  <a:tcPr marT="27432" marB="27432">
                     <a:solidFill>
                       <a:srgbClr val="FFFFFF"/>
                     </a:solidFill>
@@ -7303,7 +7785,7 @@
                       </a:r>
                     </a:p>
                   </a:txBody>
-                  <a:tcPr marL="91440" marR="91440" marT="27432" marB="27432">
+                  <a:tcPr marT="27432" marB="27432">
                     <a:solidFill>
                       <a:srgbClr val="FFFFFF"/>
                     </a:solidFill>
@@ -7326,7 +7808,7 @@
                       </a:r>
                     </a:p>
                   </a:txBody>
-                  <a:tcPr marL="91440" marR="91440" marT="27432" marB="27432">
+                  <a:tcPr marT="27432" marB="27432">
                     <a:solidFill>
                       <a:srgbClr val="FFFFFF"/>
                     </a:solidFill>
@@ -7349,7 +7831,7 @@
                       </a:r>
                     </a:p>
                   </a:txBody>
-                  <a:tcPr marL="91440" marR="91440" marT="27432" marB="27432">
+                  <a:tcPr marT="27432" marB="27432">
                     <a:solidFill>
                       <a:srgbClr val="FFFFFF"/>
                     </a:solidFill>
@@ -7372,12 +7854,17 @@
                       </a:r>
                     </a:p>
                   </a:txBody>
-                  <a:tcPr marL="91440" marR="91440" marT="27432" marB="27432">
+                  <a:tcPr marT="27432" marB="27432">
                     <a:solidFill>
                       <a:srgbClr val="FFFFFF"/>
                     </a:solidFill>
                   </a:tcPr>
                 </a:tc>
+                <a:extLst>
+                  <a:ext uri="{0D108BD9-81ED-4DB2-BD59-A6C34878D82A}">
+                    <a16:rowId xmlns:a16="http://schemas.microsoft.com/office/drawing/2014/main" val="10006"/>
+                  </a:ext>
+                </a:extLst>
               </a:tr>
               <a:tr h="329184">
                 <a:tc>
@@ -7397,7 +7884,7 @@
                       </a:r>
                     </a:p>
                   </a:txBody>
-                  <a:tcPr marL="91440" marR="91440" marT="27432" marB="27432">
+                  <a:tcPr marT="27432" marB="27432">
                     <a:solidFill>
                       <a:srgbClr val="FFFFFF"/>
                     </a:solidFill>
@@ -7420,7 +7907,7 @@
                       </a:r>
                     </a:p>
                   </a:txBody>
-                  <a:tcPr marL="91440" marR="91440" marT="27432" marB="27432">
+                  <a:tcPr marT="27432" marB="27432">
                     <a:solidFill>
                       <a:srgbClr val="FFFFFF"/>
                     </a:solidFill>
@@ -7443,7 +7930,7 @@
                       </a:r>
                     </a:p>
                   </a:txBody>
-                  <a:tcPr marL="91440" marR="91440" marT="27432" marB="27432">
+                  <a:tcPr marT="27432" marB="27432">
                     <a:solidFill>
                       <a:srgbClr val="FFFFFF"/>
                     </a:solidFill>
@@ -7466,7 +7953,7 @@
                       </a:r>
                     </a:p>
                   </a:txBody>
-                  <a:tcPr marL="91440" marR="91440" marT="27432" marB="27432">
+                  <a:tcPr marT="27432" marB="27432">
                     <a:solidFill>
                       <a:srgbClr val="FFFFFF"/>
                     </a:solidFill>
@@ -7489,7 +7976,7 @@
                       </a:r>
                     </a:p>
                   </a:txBody>
-                  <a:tcPr marL="91440" marR="91440" marT="27432" marB="27432">
+                  <a:tcPr marT="27432" marB="27432">
                     <a:solidFill>
                       <a:srgbClr val="FFFFFF"/>
                     </a:solidFill>
@@ -7512,12 +7999,17 @@
                       </a:r>
                     </a:p>
                   </a:txBody>
-                  <a:tcPr marL="91440" marR="91440" marT="27432" marB="27432">
+                  <a:tcPr marT="27432" marB="27432">
                     <a:solidFill>
                       <a:srgbClr val="FFFFFF"/>
                     </a:solidFill>
                   </a:tcPr>
                 </a:tc>
+                <a:extLst>
+                  <a:ext uri="{0D108BD9-81ED-4DB2-BD59-A6C34878D82A}">
+                    <a16:rowId xmlns:a16="http://schemas.microsoft.com/office/drawing/2014/main" val="10007"/>
+                  </a:ext>
+                </a:extLst>
               </a:tr>
               <a:tr h="329184">
                 <a:tc>
@@ -7537,7 +8029,7 @@
                       </a:r>
                     </a:p>
                   </a:txBody>
-                  <a:tcPr marL="91440" marR="91440" marT="27432" marB="27432">
+                  <a:tcPr marT="27432" marB="27432">
                     <a:solidFill>
                       <a:srgbClr val="FFFFFF"/>
                     </a:solidFill>
@@ -7560,7 +8052,7 @@
                       </a:r>
                     </a:p>
                   </a:txBody>
-                  <a:tcPr marL="91440" marR="91440" marT="27432" marB="27432">
+                  <a:tcPr marT="27432" marB="27432">
                     <a:solidFill>
                       <a:srgbClr val="FFFFFF"/>
                     </a:solidFill>
@@ -7583,7 +8075,7 @@
                       </a:r>
                     </a:p>
                   </a:txBody>
-                  <a:tcPr marL="91440" marR="91440" marT="27432" marB="27432">
+                  <a:tcPr marT="27432" marB="27432">
                     <a:solidFill>
                       <a:srgbClr val="FFFFFF"/>
                     </a:solidFill>
@@ -7606,7 +8098,7 @@
                       </a:r>
                     </a:p>
                   </a:txBody>
-                  <a:tcPr marL="91440" marR="91440" marT="27432" marB="27432">
+                  <a:tcPr marT="27432" marB="27432">
                     <a:solidFill>
                       <a:srgbClr val="FFFFFF"/>
                     </a:solidFill>
@@ -7629,7 +8121,7 @@
                       </a:r>
                     </a:p>
                   </a:txBody>
-                  <a:tcPr marL="91440" marR="91440" marT="27432" marB="27432">
+                  <a:tcPr marT="27432" marB="27432">
                     <a:solidFill>
                       <a:srgbClr val="FFFFFF"/>
                     </a:solidFill>
@@ -7652,12 +8144,17 @@
                       </a:r>
                     </a:p>
                   </a:txBody>
-                  <a:tcPr marL="91440" marR="91440" marT="27432" marB="27432">
+                  <a:tcPr marT="27432" marB="27432">
                     <a:solidFill>
                       <a:srgbClr val="FFFFFF"/>
                     </a:solidFill>
                   </a:tcPr>
                 </a:tc>
+                <a:extLst>
+                  <a:ext uri="{0D108BD9-81ED-4DB2-BD59-A6C34878D82A}">
+                    <a16:rowId xmlns:a16="http://schemas.microsoft.com/office/drawing/2014/main" val="10008"/>
+                  </a:ext>
+                </a:extLst>
               </a:tr>
               <a:tr h="329184">
                 <a:tc>
@@ -7677,7 +8174,7 @@
                       </a:r>
                     </a:p>
                   </a:txBody>
-                  <a:tcPr marL="91440" marR="91440" marT="27432" marB="27432">
+                  <a:tcPr marT="27432" marB="27432">
                     <a:solidFill>
                       <a:srgbClr val="FFFFFF"/>
                     </a:solidFill>
@@ -7700,7 +8197,7 @@
                       </a:r>
                     </a:p>
                   </a:txBody>
-                  <a:tcPr marL="91440" marR="91440" marT="27432" marB="27432">
+                  <a:tcPr marT="27432" marB="27432">
                     <a:solidFill>
                       <a:srgbClr val="FFFFFF"/>
                     </a:solidFill>
@@ -7723,7 +8220,7 @@
                       </a:r>
                     </a:p>
                   </a:txBody>
-                  <a:tcPr marL="91440" marR="91440" marT="27432" marB="27432">
+                  <a:tcPr marT="27432" marB="27432">
                     <a:solidFill>
                       <a:srgbClr val="FFFFFF"/>
                     </a:solidFill>
@@ -7746,7 +8243,7 @@
                       </a:r>
                     </a:p>
                   </a:txBody>
-                  <a:tcPr marL="91440" marR="91440" marT="27432" marB="27432">
+                  <a:tcPr marT="27432" marB="27432">
                     <a:solidFill>
                       <a:srgbClr val="FFFFFF"/>
                     </a:solidFill>
@@ -7769,7 +8266,7 @@
                       </a:r>
                     </a:p>
                   </a:txBody>
-                  <a:tcPr marL="91440" marR="91440" marT="27432" marB="27432">
+                  <a:tcPr marT="27432" marB="27432">
                     <a:solidFill>
                       <a:srgbClr val="FFFFFF"/>
                     </a:solidFill>
@@ -7792,12 +8289,17 @@
                       </a:r>
                     </a:p>
                   </a:txBody>
-                  <a:tcPr marL="91440" marR="91440" marT="27432" marB="27432">
+                  <a:tcPr marT="27432" marB="27432">
                     <a:solidFill>
                       <a:srgbClr val="FFFFFF"/>
                     </a:solidFill>
                   </a:tcPr>
                 </a:tc>
+                <a:extLst>
+                  <a:ext uri="{0D108BD9-81ED-4DB2-BD59-A6C34878D82A}">
+                    <a16:rowId xmlns:a16="http://schemas.microsoft.com/office/drawing/2014/main" val="10009"/>
+                  </a:ext>
+                </a:extLst>
               </a:tr>
               <a:tr h="329184">
                 <a:tc>
@@ -7817,7 +8319,7 @@
                       </a:r>
                     </a:p>
                   </a:txBody>
-                  <a:tcPr marL="91440" marR="91440" marT="27432" marB="27432">
+                  <a:tcPr marT="27432" marB="27432">
                     <a:solidFill>
                       <a:srgbClr val="FFFFFF"/>
                     </a:solidFill>
@@ -7840,7 +8342,7 @@
                       </a:r>
                     </a:p>
                   </a:txBody>
-                  <a:tcPr marL="91440" marR="91440" marT="27432" marB="27432">
+                  <a:tcPr marT="27432" marB="27432">
                     <a:solidFill>
                       <a:srgbClr val="FFFFFF"/>
                     </a:solidFill>
@@ -7863,7 +8365,7 @@
                       </a:r>
                     </a:p>
                   </a:txBody>
-                  <a:tcPr marL="91440" marR="91440" marT="27432" marB="27432">
+                  <a:tcPr marT="27432" marB="27432">
                     <a:solidFill>
                       <a:srgbClr val="FFFFFF"/>
                     </a:solidFill>
@@ -7886,7 +8388,7 @@
                       </a:r>
                     </a:p>
                   </a:txBody>
-                  <a:tcPr marL="91440" marR="91440" marT="27432" marB="27432">
+                  <a:tcPr marT="27432" marB="27432">
                     <a:solidFill>
                       <a:srgbClr val="FFFFFF"/>
                     </a:solidFill>
@@ -7909,7 +8411,7 @@
                       </a:r>
                     </a:p>
                   </a:txBody>
-                  <a:tcPr marL="91440" marR="91440" marT="27432" marB="27432">
+                  <a:tcPr marT="27432" marB="27432">
                     <a:solidFill>
                       <a:srgbClr val="FFFFFF"/>
                     </a:solidFill>
@@ -7932,12 +8434,17 @@
                       </a:r>
                     </a:p>
                   </a:txBody>
-                  <a:tcPr marL="91440" marR="91440" marT="27432" marB="27432">
+                  <a:tcPr marT="27432" marB="27432">
                     <a:solidFill>
                       <a:srgbClr val="FFFFFF"/>
                     </a:solidFill>
                   </a:tcPr>
                 </a:tc>
+                <a:extLst>
+                  <a:ext uri="{0D108BD9-81ED-4DB2-BD59-A6C34878D82A}">
+                    <a16:rowId xmlns:a16="http://schemas.microsoft.com/office/drawing/2014/main" val="10010"/>
+                  </a:ext>
+                </a:extLst>
               </a:tr>
               <a:tr h="329184">
                 <a:tc>
@@ -7957,7 +8464,7 @@
                       </a:r>
                     </a:p>
                   </a:txBody>
-                  <a:tcPr marL="91440" marR="91440" marT="27432" marB="27432">
+                  <a:tcPr marT="27432" marB="27432">
                     <a:solidFill>
                       <a:srgbClr val="FFFFFF"/>
                     </a:solidFill>
@@ -7980,7 +8487,7 @@
                       </a:r>
                     </a:p>
                   </a:txBody>
-                  <a:tcPr marL="91440" marR="91440" marT="27432" marB="27432">
+                  <a:tcPr marT="27432" marB="27432">
                     <a:solidFill>
                       <a:srgbClr val="FFFFFF"/>
                     </a:solidFill>
@@ -8003,7 +8510,7 @@
                       </a:r>
                     </a:p>
                   </a:txBody>
-                  <a:tcPr marL="91440" marR="91440" marT="27432" marB="27432">
+                  <a:tcPr marT="27432" marB="27432">
                     <a:solidFill>
                       <a:srgbClr val="FFFFFF"/>
                     </a:solidFill>
@@ -8026,7 +8533,7 @@
                       </a:r>
                     </a:p>
                   </a:txBody>
-                  <a:tcPr marL="91440" marR="91440" marT="27432" marB="27432">
+                  <a:tcPr marT="27432" marB="27432">
                     <a:solidFill>
                       <a:srgbClr val="FFFFFF"/>
                     </a:solidFill>
@@ -8049,7 +8556,7 @@
                       </a:r>
                     </a:p>
                   </a:txBody>
-                  <a:tcPr marL="91440" marR="91440" marT="27432" marB="27432">
+                  <a:tcPr marT="27432" marB="27432">
                     <a:solidFill>
                       <a:srgbClr val="FFFFFF"/>
                     </a:solidFill>
@@ -8072,12 +8579,17 @@
                       </a:r>
                     </a:p>
                   </a:txBody>
-                  <a:tcPr marL="91440" marR="91440" marT="27432" marB="27432">
+                  <a:tcPr marT="27432" marB="27432">
                     <a:solidFill>
                       <a:srgbClr val="FFFFFF"/>
                     </a:solidFill>
                   </a:tcPr>
                 </a:tc>
+                <a:extLst>
+                  <a:ext uri="{0D108BD9-81ED-4DB2-BD59-A6C34878D82A}">
+                    <a16:rowId xmlns:a16="http://schemas.microsoft.com/office/drawing/2014/main" val="10011"/>
+                  </a:ext>
+                </a:extLst>
               </a:tr>
               <a:tr h="329184">
                 <a:tc>
@@ -8097,7 +8609,7 @@
                       </a:r>
                     </a:p>
                   </a:txBody>
-                  <a:tcPr marL="91440" marR="91440" marT="27432" marB="27432">
+                  <a:tcPr marT="27432" marB="27432">
                     <a:solidFill>
                       <a:srgbClr val="FFFFFF"/>
                     </a:solidFill>
@@ -8120,7 +8632,7 @@
                       </a:r>
                     </a:p>
                   </a:txBody>
-                  <a:tcPr marL="91440" marR="91440" marT="27432" marB="27432">
+                  <a:tcPr marT="27432" marB="27432">
                     <a:solidFill>
                       <a:srgbClr val="FFFFFF"/>
                     </a:solidFill>
@@ -8143,7 +8655,7 @@
                       </a:r>
                     </a:p>
                   </a:txBody>
-                  <a:tcPr marL="91440" marR="91440" marT="27432" marB="27432">
+                  <a:tcPr marT="27432" marB="27432">
                     <a:solidFill>
                       <a:srgbClr val="FFFFFF"/>
                     </a:solidFill>
@@ -8166,7 +8678,7 @@
                       </a:r>
                     </a:p>
                   </a:txBody>
-                  <a:tcPr marL="91440" marR="91440" marT="27432" marB="27432">
+                  <a:tcPr marT="27432" marB="27432">
                     <a:solidFill>
                       <a:srgbClr val="FFFFFF"/>
                     </a:solidFill>
@@ -8189,7 +8701,7 @@
                       </a:r>
                     </a:p>
                   </a:txBody>
-                  <a:tcPr marL="91440" marR="91440" marT="27432" marB="27432">
+                  <a:tcPr marT="27432" marB="27432">
                     <a:solidFill>
                       <a:srgbClr val="FFFFFF"/>
                     </a:solidFill>
@@ -8212,12 +8724,17 @@
                       </a:r>
                     </a:p>
                   </a:txBody>
-                  <a:tcPr marL="91440" marR="91440" marT="27432" marB="27432">
+                  <a:tcPr marT="27432" marB="27432">
                     <a:solidFill>
                       <a:srgbClr val="FFFFFF"/>
                     </a:solidFill>
                   </a:tcPr>
                 </a:tc>
+                <a:extLst>
+                  <a:ext uri="{0D108BD9-81ED-4DB2-BD59-A6C34878D82A}">
+                    <a16:rowId xmlns:a16="http://schemas.microsoft.com/office/drawing/2014/main" val="10012"/>
+                  </a:ext>
+                </a:extLst>
               </a:tr>
             </a:tbl>
           </a:graphicData>
@@ -8240,7 +8757,7 @@
           <a:noFill/>
         </p:spPr>
         <p:txBody>
-          <a:bodyPr wrap="square" anchor="t" lIns="0" rIns="0" tIns="0" bIns="0">
+          <a:bodyPr wrap="square" lIns="0" tIns="0" rIns="0" bIns="0" anchor="t">
             <a:spAutoFit/>
           </a:bodyPr>
           <a:lstStyle/>
@@ -8279,7 +8796,7 @@
           <a:noFill/>
         </p:spPr>
         <p:txBody>
-          <a:bodyPr wrap="square" anchor="t" lIns="0" rIns="0" tIns="0" bIns="0">
+          <a:bodyPr wrap="square" lIns="0" tIns="0" rIns="0" bIns="0" anchor="t">
             <a:spAutoFit/>
           </a:bodyPr>
           <a:lstStyle/>
@@ -8306,7 +8823,7 @@
 </file>
 
 <file path=ppt/slides/slide18.xml><?xml version="1.0" encoding="utf-8"?>
-<p:sld xmlns:a="http://schemas.openxmlformats.org/drawingml/2006/main" xmlns:p="http://schemas.openxmlformats.org/presentationml/2006/main" xmlns:r="http://schemas.openxmlformats.org/officeDocument/2006/relationships">
+<p:sld xmlns:a="http://schemas.openxmlformats.org/drawingml/2006/main" xmlns:r="http://schemas.openxmlformats.org/officeDocument/2006/relationships" xmlns:p="http://schemas.openxmlformats.org/presentationml/2006/main">
   <p:cSld>
     <p:spTree>
       <p:nvGrpSpPr>
@@ -8314,7 +8831,14 @@
         <p:cNvGrpSpPr/>
         <p:nvPr/>
       </p:nvGrpSpPr>
-      <p:grpSpPr/>
+      <p:grpSpPr>
+        <a:xfrm>
+          <a:off x="0" y="0"/>
+          <a:ext cx="0" cy="0"/>
+          <a:chOff x="0" y="0"/>
+          <a:chExt cx="0" cy="0"/>
+        </a:xfrm>
+      </p:grpSpPr>
       <p:sp>
         <p:nvSpPr>
           <p:cNvPr id="2" name="TextBox 1"/>
@@ -8332,7 +8856,7 @@
           <a:noFill/>
         </p:spPr>
         <p:txBody>
-          <a:bodyPr wrap="square" anchor="t" lIns="0" rIns="0" tIns="0" bIns="0">
+          <a:bodyPr wrap="square" lIns="0" tIns="0" rIns="0" bIns="0" anchor="t">
             <a:spAutoFit/>
           </a:bodyPr>
           <a:lstStyle/>
@@ -8371,7 +8895,7 @@
           <a:noFill/>
         </p:spPr>
         <p:txBody>
-          <a:bodyPr wrap="square" anchor="t" lIns="0" rIns="0" tIns="0" bIns="0">
+          <a:bodyPr wrap="square" lIns="0" tIns="0" rIns="0" bIns="0" anchor="t">
             <a:spAutoFit/>
           </a:bodyPr>
           <a:lstStyle/>
@@ -8410,7 +8934,7 @@
           <a:noFill/>
         </p:spPr>
         <p:txBody>
-          <a:bodyPr wrap="square" anchor="t" lIns="0" rIns="0" tIns="0" bIns="0">
+          <a:bodyPr wrap="square" lIns="0" tIns="0" rIns="0" bIns="0" anchor="t">
             <a:spAutoFit/>
           </a:bodyPr>
           <a:lstStyle/>
@@ -8445,7 +8969,7 @@
           <a:noFill/>
         </p:spPr>
         <p:txBody>
-          <a:bodyPr wrap="square" anchor="t" lIns="0" rIns="0" tIns="0" bIns="0">
+          <a:bodyPr wrap="square" lIns="0" tIns="0" rIns="0" bIns="0" anchor="t">
             <a:spAutoFit/>
           </a:bodyPr>
           <a:lstStyle/>
@@ -8480,7 +9004,7 @@
           <a:noFill/>
         </p:spPr>
         <p:txBody>
-          <a:bodyPr wrap="square" anchor="t" lIns="0" rIns="0" tIns="0" bIns="0">
+          <a:bodyPr wrap="square" lIns="0" tIns="0" rIns="0" bIns="0" anchor="t">
             <a:spAutoFit/>
           </a:bodyPr>
           <a:lstStyle/>
@@ -8515,7 +9039,7 @@
           <a:noFill/>
         </p:spPr>
         <p:txBody>
-          <a:bodyPr wrap="square" anchor="t" lIns="0" rIns="0" tIns="0" bIns="0">
+          <a:bodyPr wrap="square" lIns="0" tIns="0" rIns="0" bIns="0" anchor="t">
             <a:spAutoFit/>
           </a:bodyPr>
           <a:lstStyle/>
@@ -8550,7 +9074,7 @@
           <a:noFill/>
         </p:spPr>
         <p:txBody>
-          <a:bodyPr wrap="square" anchor="t" lIns="0" rIns="0" tIns="0" bIns="0">
+          <a:bodyPr wrap="square" lIns="0" tIns="0" rIns="0" bIns="0" anchor="t">
             <a:spAutoFit/>
           </a:bodyPr>
           <a:lstStyle/>
@@ -8585,7 +9109,7 @@
           <a:noFill/>
         </p:spPr>
         <p:txBody>
-          <a:bodyPr wrap="square" anchor="t" lIns="0" rIns="0" tIns="0" bIns="0">
+          <a:bodyPr wrap="square" lIns="0" tIns="0" rIns="0" bIns="0" anchor="t">
             <a:spAutoFit/>
           </a:bodyPr>
           <a:lstStyle/>
@@ -8620,7 +9144,7 @@
           <a:noFill/>
         </p:spPr>
         <p:txBody>
-          <a:bodyPr wrap="square" anchor="t" lIns="0" rIns="0" tIns="0" bIns="0">
+          <a:bodyPr wrap="square" lIns="0" tIns="0" rIns="0" bIns="0" anchor="t">
             <a:spAutoFit/>
           </a:bodyPr>
           <a:lstStyle/>
@@ -8659,7 +9183,7 @@
           <a:noFill/>
         </p:spPr>
         <p:txBody>
-          <a:bodyPr wrap="square" anchor="t" lIns="0" rIns="0" tIns="0" bIns="0">
+          <a:bodyPr wrap="square" lIns="0" tIns="0" rIns="0" bIns="0" anchor="t">
             <a:spAutoFit/>
           </a:bodyPr>
           <a:lstStyle/>
@@ -8686,7 +9210,7 @@
 </file>
 
 <file path=ppt/slides/slide19.xml><?xml version="1.0" encoding="utf-8"?>
-<p:sld xmlns:a="http://schemas.openxmlformats.org/drawingml/2006/main" xmlns:p="http://schemas.openxmlformats.org/presentationml/2006/main" xmlns:r="http://schemas.openxmlformats.org/officeDocument/2006/relationships">
+<p:sld xmlns:a="http://schemas.openxmlformats.org/drawingml/2006/main" xmlns:r="http://schemas.openxmlformats.org/officeDocument/2006/relationships" xmlns:p="http://schemas.openxmlformats.org/presentationml/2006/main">
   <p:cSld>
     <p:spTree>
       <p:nvGrpSpPr>
@@ -8694,7 +9218,14 @@
         <p:cNvGrpSpPr/>
         <p:nvPr/>
       </p:nvGrpSpPr>
-      <p:grpSpPr/>
+      <p:grpSpPr>
+        <a:xfrm>
+          <a:off x="0" y="0"/>
+          <a:ext cx="0" cy="0"/>
+          <a:chOff x="0" y="0"/>
+          <a:chExt cx="0" cy="0"/>
+        </a:xfrm>
+      </p:grpSpPr>
       <p:sp>
         <p:nvSpPr>
           <p:cNvPr id="2" name="TextBox 1"/>
@@ -8712,7 +9243,7 @@
           <a:noFill/>
         </p:spPr>
         <p:txBody>
-          <a:bodyPr wrap="square" anchor="t" lIns="0" rIns="0" tIns="0" bIns="0">
+          <a:bodyPr wrap="square" lIns="0" tIns="0" rIns="0" bIns="0" anchor="t">
             <a:spAutoFit/>
           </a:bodyPr>
           <a:lstStyle/>
@@ -8751,7 +9282,7 @@
           <a:noFill/>
         </p:spPr>
         <p:txBody>
-          <a:bodyPr wrap="square" anchor="t" lIns="0" rIns="0" tIns="0" bIns="0">
+          <a:bodyPr wrap="square" lIns="0" tIns="0" rIns="0" bIns="0" anchor="t">
             <a:spAutoFit/>
           </a:bodyPr>
           <a:lstStyle/>
@@ -8762,13 +9293,49 @@
               </a:lnSpc>
             </a:pPr>
             <a:r>
-              <a:rPr sz="1500" b="0" i="1">
+              <a:rPr sz="1500" b="0" i="1" dirty="0">
                 <a:solidFill>
                   <a:srgbClr val="707070"/>
                 </a:solidFill>
                 <a:latin typeface="Calibri"/>
               </a:rPr>
-              <a:t>Lean B drops 95 of 208 features, keeping ditto_score and metarnn_score (the per-feature winners).</a:t>
+              <a:t>Lean B drops 95 of 208 features, keeping </a:t>
+            </a:r>
+            <a:r>
+              <a:rPr sz="1500" b="0" i="1" dirty="0" err="1">
+                <a:solidFill>
+                  <a:srgbClr val="707070"/>
+                </a:solidFill>
+                <a:latin typeface="Calibri"/>
+              </a:rPr>
+              <a:t>ditto_score</a:t>
+            </a:r>
+            <a:r>
+              <a:rPr sz="1500" b="0" i="1" dirty="0">
+                <a:solidFill>
+                  <a:srgbClr val="707070"/>
+                </a:solidFill>
+                <a:latin typeface="Calibri"/>
+              </a:rPr>
+              <a:t> and </a:t>
+            </a:r>
+            <a:r>
+              <a:rPr sz="1500" b="0" i="1" dirty="0" err="1">
+                <a:solidFill>
+                  <a:srgbClr val="707070"/>
+                </a:solidFill>
+                <a:latin typeface="Calibri"/>
+              </a:rPr>
+              <a:t>metarnn_score</a:t>
+            </a:r>
+            <a:r>
+              <a:rPr sz="1500" b="0" i="1" dirty="0">
+                <a:solidFill>
+                  <a:srgbClr val="707070"/>
+                </a:solidFill>
+                <a:latin typeface="Calibri"/>
+              </a:rPr>
+              <a:t> (the per-feature winners).</a:t>
             </a:r>
           </a:p>
         </p:txBody>
@@ -8787,7 +9354,7 @@
         </p:xfrm>
         <a:graphic>
           <a:graphicData uri="http://schemas.openxmlformats.org/drawingml/2006/chart">
-            <c:chart xmlns:c="http://schemas.openxmlformats.org/drawingml/2006/chart" r:id="rId2"/>
+            <c:chart xmlns:c="http://schemas.openxmlformats.org/drawingml/2006/chart" xmlns:r="http://schemas.openxmlformats.org/officeDocument/2006/relationships" r:id="rId2"/>
           </a:graphicData>
         </a:graphic>
       </p:graphicFrame>
@@ -8808,7 +9375,7 @@
           <a:noFill/>
         </p:spPr>
         <p:txBody>
-          <a:bodyPr wrap="square" anchor="t" lIns="0" rIns="0" tIns="0" bIns="0">
+          <a:bodyPr wrap="square" lIns="0" tIns="0" rIns="0" bIns="0" anchor="t">
             <a:spAutoFit/>
           </a:bodyPr>
           <a:lstStyle/>
@@ -8847,7 +9414,7 @@
           <a:noFill/>
         </p:spPr>
         <p:txBody>
-          <a:bodyPr wrap="square" anchor="t" lIns="0" rIns="0" tIns="0" bIns="0">
+          <a:bodyPr wrap="square" lIns="0" tIns="0" rIns="0" bIns="0" anchor="t">
             <a:spAutoFit/>
           </a:bodyPr>
           <a:lstStyle/>
@@ -8874,7 +9441,7 @@
 </file>
 
 <file path=ppt/slides/slide2.xml><?xml version="1.0" encoding="utf-8"?>
-<p:sld xmlns:a="http://schemas.openxmlformats.org/drawingml/2006/main" xmlns:p="http://schemas.openxmlformats.org/presentationml/2006/main" xmlns:r="http://schemas.openxmlformats.org/officeDocument/2006/relationships">
+<p:sld xmlns:a="http://schemas.openxmlformats.org/drawingml/2006/main" xmlns:r="http://schemas.openxmlformats.org/officeDocument/2006/relationships" xmlns:p="http://schemas.openxmlformats.org/presentationml/2006/main">
   <p:cSld>
     <p:spTree>
       <p:nvGrpSpPr>
@@ -8882,7 +9449,14 @@
         <p:cNvGrpSpPr/>
         <p:nvPr/>
       </p:nvGrpSpPr>
-      <p:grpSpPr/>
+      <p:grpSpPr>
+        <a:xfrm>
+          <a:off x="0" y="0"/>
+          <a:ext cx="0" cy="0"/>
+          <a:chOff x="0" y="0"/>
+          <a:chExt cx="0" cy="0"/>
+        </a:xfrm>
+      </p:grpSpPr>
       <p:sp>
         <p:nvSpPr>
           <p:cNvPr id="2" name="TextBox 1"/>
@@ -8900,7 +9474,7 @@
           <a:noFill/>
         </p:spPr>
         <p:txBody>
-          <a:bodyPr wrap="square" anchor="t" lIns="0" rIns="0" tIns="0" bIns="0">
+          <a:bodyPr wrap="square" lIns="0" tIns="0" rIns="0" bIns="0" anchor="t">
             <a:spAutoFit/>
           </a:bodyPr>
           <a:lstStyle/>
@@ -8939,7 +9513,7 @@
           <a:noFill/>
         </p:spPr>
         <p:txBody>
-          <a:bodyPr wrap="square" anchor="t" lIns="0" rIns="0" tIns="0" bIns="0">
+          <a:bodyPr wrap="square" lIns="0" tIns="0" rIns="0" bIns="0" anchor="t">
             <a:spAutoFit/>
           </a:bodyPr>
           <a:lstStyle/>
@@ -8978,7 +9552,7 @@
           <a:noFill/>
         </p:spPr>
         <p:txBody>
-          <a:bodyPr wrap="square" anchor="t" lIns="0" rIns="0" tIns="0" bIns="0">
+          <a:bodyPr wrap="square" lIns="0" tIns="0" rIns="0" bIns="0" anchor="t">
             <a:spAutoFit/>
           </a:bodyPr>
           <a:lstStyle/>
@@ -9013,7 +9587,7 @@
           <a:noFill/>
         </p:spPr>
         <p:txBody>
-          <a:bodyPr wrap="square" anchor="t" lIns="0" rIns="0" tIns="0" bIns="0">
+          <a:bodyPr wrap="square" lIns="0" tIns="0" rIns="0" bIns="0" anchor="t">
             <a:spAutoFit/>
           </a:bodyPr>
           <a:lstStyle/>
@@ -9052,7 +9626,7 @@
           <a:noFill/>
         </p:spPr>
         <p:txBody>
-          <a:bodyPr wrap="square" anchor="t" lIns="0" rIns="0" tIns="0" bIns="0">
+          <a:bodyPr wrap="square" lIns="0" tIns="0" rIns="0" bIns="0" anchor="t">
             <a:spAutoFit/>
           </a:bodyPr>
           <a:lstStyle/>
@@ -9087,7 +9661,7 @@
           <a:noFill/>
         </p:spPr>
         <p:txBody>
-          <a:bodyPr wrap="square" anchor="t" lIns="0" rIns="0" tIns="0" bIns="0">
+          <a:bodyPr wrap="square" lIns="0" tIns="0" rIns="0" bIns="0" anchor="t">
             <a:spAutoFit/>
           </a:bodyPr>
           <a:lstStyle/>
@@ -9126,7 +9700,7 @@
           <a:noFill/>
         </p:spPr>
         <p:txBody>
-          <a:bodyPr wrap="square" anchor="t" lIns="0" rIns="0" tIns="0" bIns="0">
+          <a:bodyPr wrap="square" lIns="0" tIns="0" rIns="0" bIns="0" anchor="t">
             <a:spAutoFit/>
           </a:bodyPr>
           <a:lstStyle/>
@@ -9161,7 +9735,7 @@
           <a:noFill/>
         </p:spPr>
         <p:txBody>
-          <a:bodyPr wrap="square" anchor="t" lIns="0" rIns="0" tIns="0" bIns="0">
+          <a:bodyPr wrap="square" lIns="0" tIns="0" rIns="0" bIns="0" anchor="t">
             <a:spAutoFit/>
           </a:bodyPr>
           <a:lstStyle/>
@@ -9200,7 +9774,7 @@
           <a:noFill/>
         </p:spPr>
         <p:txBody>
-          <a:bodyPr wrap="square" anchor="t" lIns="0" rIns="0" tIns="0" bIns="0">
+          <a:bodyPr wrap="square" lIns="0" tIns="0" rIns="0" bIns="0" anchor="t">
             <a:spAutoFit/>
           </a:bodyPr>
           <a:lstStyle/>
@@ -9227,7 +9801,7 @@
 </file>
 
 <file path=ppt/slides/slide20.xml><?xml version="1.0" encoding="utf-8"?>
-<p:sld xmlns:a="http://schemas.openxmlformats.org/drawingml/2006/main" xmlns:p="http://schemas.openxmlformats.org/presentationml/2006/main" xmlns:r="http://schemas.openxmlformats.org/officeDocument/2006/relationships">
+<p:sld xmlns:a="http://schemas.openxmlformats.org/drawingml/2006/main" xmlns:r="http://schemas.openxmlformats.org/officeDocument/2006/relationships" xmlns:p="http://schemas.openxmlformats.org/presentationml/2006/main">
   <p:cSld>
     <p:spTree>
       <p:nvGrpSpPr>
@@ -9235,7 +9809,14 @@
         <p:cNvGrpSpPr/>
         <p:nvPr/>
       </p:nvGrpSpPr>
-      <p:grpSpPr/>
+      <p:grpSpPr>
+        <a:xfrm>
+          <a:off x="0" y="0"/>
+          <a:ext cx="0" cy="0"/>
+          <a:chOff x="0" y="0"/>
+          <a:chExt cx="0" cy="0"/>
+        </a:xfrm>
+      </p:grpSpPr>
       <p:sp>
         <p:nvSpPr>
           <p:cNvPr id="2" name="TextBox 1"/>
@@ -9253,7 +9834,7 @@
           <a:noFill/>
         </p:spPr>
         <p:txBody>
-          <a:bodyPr wrap="square" anchor="t" lIns="0" rIns="0" tIns="0" bIns="0">
+          <a:bodyPr wrap="square" lIns="0" tIns="0" rIns="0" bIns="0" anchor="t">
             <a:spAutoFit/>
           </a:bodyPr>
           <a:lstStyle/>
@@ -9292,7 +9873,7 @@
           <a:noFill/>
         </p:spPr>
         <p:txBody>
-          <a:bodyPr wrap="square" anchor="t" lIns="0" rIns="0" tIns="0" bIns="0">
+          <a:bodyPr wrap="square" lIns="0" tIns="0" rIns="0" bIns="0" anchor="t">
             <a:spAutoFit/>
           </a:bodyPr>
           <a:lstStyle/>
@@ -9327,7 +9908,7 @@
           <a:noFill/>
         </p:spPr>
         <p:txBody>
-          <a:bodyPr wrap="square" anchor="t" lIns="0" rIns="0" tIns="0" bIns="0">
+          <a:bodyPr wrap="square" lIns="0" tIns="0" rIns="0" bIns="0" anchor="t">
             <a:spAutoFit/>
           </a:bodyPr>
           <a:lstStyle/>
@@ -9362,7 +9943,7 @@
           <a:noFill/>
         </p:spPr>
         <p:txBody>
-          <a:bodyPr wrap="square" anchor="t" lIns="0" rIns="0" tIns="0" bIns="0">
+          <a:bodyPr wrap="square" lIns="0" tIns="0" rIns="0" bIns="0" anchor="t">
             <a:spAutoFit/>
           </a:bodyPr>
           <a:lstStyle/>
@@ -9401,7 +9982,7 @@
           <a:noFill/>
         </p:spPr>
         <p:txBody>
-          <a:bodyPr wrap="square" anchor="t" lIns="0" rIns="0" tIns="0" bIns="0">
+          <a:bodyPr wrap="square" lIns="0" tIns="0" rIns="0" bIns="0" anchor="t">
             <a:spAutoFit/>
           </a:bodyPr>
           <a:lstStyle/>
@@ -9436,7 +10017,7 @@
           <a:noFill/>
         </p:spPr>
         <p:txBody>
-          <a:bodyPr wrap="square" anchor="t" lIns="0" rIns="0" tIns="0" bIns="0">
+          <a:bodyPr wrap="square" lIns="0" tIns="0" rIns="0" bIns="0" anchor="t">
             <a:spAutoFit/>
           </a:bodyPr>
           <a:lstStyle/>
@@ -9471,7 +10052,7 @@
           <a:noFill/>
         </p:spPr>
         <p:txBody>
-          <a:bodyPr wrap="square" anchor="t" lIns="0" rIns="0" tIns="0" bIns="0">
+          <a:bodyPr wrap="square" lIns="0" tIns="0" rIns="0" bIns="0" anchor="t">
             <a:spAutoFit/>
           </a:bodyPr>
           <a:lstStyle/>
@@ -9510,7 +10091,7 @@
           <a:noFill/>
         </p:spPr>
         <p:txBody>
-          <a:bodyPr wrap="square" anchor="t" lIns="0" rIns="0" tIns="0" bIns="0">
+          <a:bodyPr wrap="square" lIns="0" tIns="0" rIns="0" bIns="0" anchor="t">
             <a:spAutoFit/>
           </a:bodyPr>
           <a:lstStyle/>
@@ -9545,7 +10126,7 @@
           <a:noFill/>
         </p:spPr>
         <p:txBody>
-          <a:bodyPr wrap="square" anchor="t" lIns="0" rIns="0" tIns="0" bIns="0">
+          <a:bodyPr wrap="square" lIns="0" tIns="0" rIns="0" bIns="0" anchor="t">
             <a:spAutoFit/>
           </a:bodyPr>
           <a:lstStyle/>
@@ -9580,7 +10161,7 @@
           <a:noFill/>
         </p:spPr>
         <p:txBody>
-          <a:bodyPr wrap="square" anchor="t" lIns="0" rIns="0" tIns="0" bIns="0">
+          <a:bodyPr wrap="square" lIns="0" tIns="0" rIns="0" bIns="0" anchor="t">
             <a:spAutoFit/>
           </a:bodyPr>
           <a:lstStyle/>
@@ -9619,7 +10200,7 @@
           <a:noFill/>
         </p:spPr>
         <p:txBody>
-          <a:bodyPr wrap="square" anchor="t" lIns="0" rIns="0" tIns="0" bIns="0">
+          <a:bodyPr wrap="square" lIns="0" tIns="0" rIns="0" bIns="0" anchor="t">
             <a:spAutoFit/>
           </a:bodyPr>
           <a:lstStyle/>
@@ -9654,7 +10235,7 @@
           <a:noFill/>
         </p:spPr>
         <p:txBody>
-          <a:bodyPr wrap="square" anchor="t" lIns="0" rIns="0" tIns="0" bIns="0">
+          <a:bodyPr wrap="square" lIns="0" tIns="0" rIns="0" bIns="0" anchor="t">
             <a:spAutoFit/>
           </a:bodyPr>
           <a:lstStyle/>
@@ -9689,7 +10270,7 @@
           <a:noFill/>
         </p:spPr>
         <p:txBody>
-          <a:bodyPr wrap="square" anchor="t" lIns="0" rIns="0" tIns="0" bIns="0">
+          <a:bodyPr wrap="square" lIns="0" tIns="0" rIns="0" bIns="0" anchor="t">
             <a:spAutoFit/>
           </a:bodyPr>
           <a:lstStyle/>
@@ -9728,7 +10309,7 @@
           <a:noFill/>
         </p:spPr>
         <p:txBody>
-          <a:bodyPr wrap="square" anchor="t" lIns="0" rIns="0" tIns="0" bIns="0">
+          <a:bodyPr wrap="square" lIns="0" tIns="0" rIns="0" bIns="0" anchor="t">
             <a:spAutoFit/>
           </a:bodyPr>
           <a:lstStyle/>
@@ -9763,7 +10344,7 @@
           <a:noFill/>
         </p:spPr>
         <p:txBody>
-          <a:bodyPr wrap="square" anchor="t" lIns="0" rIns="0" tIns="0" bIns="0">
+          <a:bodyPr wrap="square" lIns="0" tIns="0" rIns="0" bIns="0" anchor="t">
             <a:spAutoFit/>
           </a:bodyPr>
           <a:lstStyle/>
@@ -9798,7 +10379,7 @@
           <a:noFill/>
         </p:spPr>
         <p:txBody>
-          <a:bodyPr wrap="square" anchor="t" lIns="0" rIns="0" tIns="0" bIns="0">
+          <a:bodyPr wrap="square" lIns="0" tIns="0" rIns="0" bIns="0" anchor="t">
             <a:spAutoFit/>
           </a:bodyPr>
           <a:lstStyle/>
@@ -9837,7 +10418,7 @@
           <a:noFill/>
         </p:spPr>
         <p:txBody>
-          <a:bodyPr wrap="square" anchor="t" lIns="0" rIns="0" tIns="0" bIns="0">
+          <a:bodyPr wrap="square" lIns="0" tIns="0" rIns="0" bIns="0" anchor="t">
             <a:spAutoFit/>
           </a:bodyPr>
           <a:lstStyle/>
@@ -9872,7 +10453,7 @@
           <a:noFill/>
         </p:spPr>
         <p:txBody>
-          <a:bodyPr wrap="square" anchor="t" lIns="0" rIns="0" tIns="0" bIns="0">
+          <a:bodyPr wrap="square" lIns="0" tIns="0" rIns="0" bIns="0" anchor="t">
             <a:spAutoFit/>
           </a:bodyPr>
           <a:lstStyle/>
@@ -9907,7 +10488,7 @@
           <a:noFill/>
         </p:spPr>
         <p:txBody>
-          <a:bodyPr wrap="square" anchor="t" lIns="0" rIns="0" tIns="0" bIns="0">
+          <a:bodyPr wrap="square" lIns="0" tIns="0" rIns="0" bIns="0" anchor="t">
             <a:spAutoFit/>
           </a:bodyPr>
           <a:lstStyle/>
@@ -9946,7 +10527,7 @@
           <a:noFill/>
         </p:spPr>
         <p:txBody>
-          <a:bodyPr wrap="square" anchor="t" lIns="0" rIns="0" tIns="0" bIns="0">
+          <a:bodyPr wrap="square" lIns="0" tIns="0" rIns="0" bIns="0" anchor="t">
             <a:spAutoFit/>
           </a:bodyPr>
           <a:lstStyle/>
@@ -9973,7 +10554,7 @@
 </file>
 
 <file path=ppt/slides/slide21.xml><?xml version="1.0" encoding="utf-8"?>
-<p:sld xmlns:a="http://schemas.openxmlformats.org/drawingml/2006/main" xmlns:p="http://schemas.openxmlformats.org/presentationml/2006/main" xmlns:r="http://schemas.openxmlformats.org/officeDocument/2006/relationships">
+<p:sld xmlns:a="http://schemas.openxmlformats.org/drawingml/2006/main" xmlns:r="http://schemas.openxmlformats.org/officeDocument/2006/relationships" xmlns:p="http://schemas.openxmlformats.org/presentationml/2006/main">
   <p:cSld>
     <p:spTree>
       <p:nvGrpSpPr>
@@ -9981,7 +10562,14 @@
         <p:cNvGrpSpPr/>
         <p:nvPr/>
       </p:nvGrpSpPr>
-      <p:grpSpPr/>
+      <p:grpSpPr>
+        <a:xfrm>
+          <a:off x="0" y="0"/>
+          <a:ext cx="0" cy="0"/>
+          <a:chOff x="0" y="0"/>
+          <a:chExt cx="0" cy="0"/>
+        </a:xfrm>
+      </p:grpSpPr>
       <p:sp>
         <p:nvSpPr>
           <p:cNvPr id="2" name="Rectangle 1"/>
@@ -10022,6 +10610,7 @@
           <a:lstStyle/>
           <a:p>
             <a:pPr algn="ctr"/>
+            <a:endParaRPr/>
           </a:p>
         </p:txBody>
       </p:sp>
@@ -10033,7 +10622,7 @@
         </p:nvSpPr>
         <p:spPr>
           <a:xfrm>
-            <a:off x="1097280" y="2286000"/>
+            <a:off x="1036320" y="590550"/>
             <a:ext cx="10058400" cy="1371600"/>
           </a:xfrm>
           <a:prstGeom prst="rect">
@@ -10042,14 +10631,14 @@
           <a:noFill/>
         </p:spPr>
         <p:txBody>
-          <a:bodyPr wrap="square" anchor="t" lIns="0" rIns="0" tIns="0" bIns="0">
+          <a:bodyPr wrap="square" lIns="0" tIns="0" rIns="0" bIns="0" anchor="t">
             <a:spAutoFit/>
           </a:bodyPr>
           <a:lstStyle/>
           <a:p>
             <a:pPr algn="l"/>
             <a:r>
-              <a:rPr sz="8800" b="1" i="0">
+              <a:rPr sz="8800" b="1" i="0" dirty="0">
                 <a:solidFill>
                   <a:srgbClr val="000000"/>
                 </a:solidFill>
@@ -10062,14 +10651,14 @@
       </p:sp>
       <p:sp>
         <p:nvSpPr>
-          <p:cNvPr id="4" name="TextBox 3"/>
+          <p:cNvPr id="5" name="TextBox 4"/>
           <p:cNvSpPr txBox="1"/>
           <p:nvPr/>
         </p:nvSpPr>
         <p:spPr>
           <a:xfrm>
-            <a:off x="1097280" y="3749039"/>
-            <a:ext cx="10058400" cy="548640"/>
+            <a:off x="1036320" y="2033270"/>
+            <a:ext cx="10058400" cy="276999"/>
           </a:xfrm>
           <a:prstGeom prst="rect">
             <a:avLst/>
@@ -10077,34 +10666,49 @@
           <a:noFill/>
         </p:spPr>
         <p:txBody>
-          <a:bodyPr wrap="square" anchor="t" lIns="0" rIns="0" tIns="0" bIns="0">
+          <a:bodyPr wrap="square" lIns="0" tIns="0" rIns="0" bIns="0" anchor="t">
             <a:spAutoFit/>
           </a:bodyPr>
           <a:lstStyle/>
           <a:p>
             <a:pPr algn="l"/>
             <a:r>
-              <a:rPr sz="3200" b="0" i="1">
-                <a:solidFill>
-                  <a:srgbClr val="202020"/>
-                </a:solidFill>
-                <a:latin typeface="Georgia"/>
-              </a:rPr>
-              <a:t>Questions?</a:t>
-            </a:r>
-          </a:p>
-        </p:txBody>
-      </p:sp>
-      <p:sp>
-        <p:nvSpPr>
-          <p:cNvPr id="5" name="TextBox 4"/>
+              <a:rPr sz="1800" b="0" i="0" dirty="0">
+                <a:solidFill>
+                  <a:srgbClr val="000000"/>
+                </a:solidFill>
+                <a:latin typeface="Calibri"/>
+              </a:rPr>
+              <a:t>Doruk Topcu  ·  Alihan </a:t>
+            </a:r>
+            <a:r>
+              <a:rPr sz="1800" b="0" i="0" dirty="0" err="1">
+                <a:solidFill>
+                  <a:srgbClr val="000000"/>
+                </a:solidFill>
+                <a:latin typeface="Calibri"/>
+              </a:rPr>
+              <a:t>Sağöz</a:t>
+            </a:r>
+            <a:endParaRPr lang="en-US" sz="1800" b="0" i="0" dirty="0">
+              <a:solidFill>
+                <a:srgbClr val="000000"/>
+              </a:solidFill>
+              <a:latin typeface="Calibri"/>
+            </a:endParaRPr>
+          </a:p>
+        </p:txBody>
+      </p:sp>
+      <p:sp>
+        <p:nvSpPr>
+          <p:cNvPr id="6" name="TextBox 5"/>
           <p:cNvSpPr txBox="1"/>
           <p:nvPr/>
         </p:nvSpPr>
         <p:spPr>
           <a:xfrm>
-            <a:off x="1097280" y="5303520"/>
-            <a:ext cx="10058400" cy="365760"/>
+            <a:off x="1036320" y="2934970"/>
+            <a:ext cx="10058400" cy="861774"/>
           </a:xfrm>
           <a:prstGeom prst="rect">
             <a:avLst/>
@@ -10112,56 +10716,147 @@
           <a:noFill/>
         </p:spPr>
         <p:txBody>
-          <a:bodyPr wrap="square" anchor="t" lIns="0" rIns="0" tIns="0" bIns="0">
+          <a:bodyPr wrap="square" lIns="0" tIns="0" rIns="0" bIns="0" anchor="t">
             <a:spAutoFit/>
           </a:bodyPr>
           <a:lstStyle/>
           <a:p>
-            <a:pPr algn="l"/>
-            <a:r>
-              <a:rPr sz="1800" b="0" i="0">
-                <a:solidFill>
-                  <a:srgbClr val="000000"/>
-                </a:solidFill>
-                <a:latin typeface="Calibri"/>
-              </a:rPr>
-              <a:t>Doruk Topcu  ·  Alihan Sağöz</a:t>
-            </a:r>
-          </a:p>
-        </p:txBody>
-      </p:sp>
-      <p:sp>
-        <p:nvSpPr>
-          <p:cNvPr id="6" name="TextBox 5"/>
-          <p:cNvSpPr txBox="1"/>
-          <p:nvPr/>
-        </p:nvSpPr>
-        <p:spPr>
-          <a:xfrm>
-            <a:off x="1097280" y="5760720"/>
-            <a:ext cx="10058400" cy="365760"/>
-          </a:xfrm>
-          <a:prstGeom prst="rect">
-            <a:avLst/>
-          </a:prstGeom>
-          <a:noFill/>
-        </p:spPr>
-        <p:txBody>
-          <a:bodyPr wrap="square" anchor="t" lIns="0" rIns="0" tIns="0" bIns="0">
-            <a:spAutoFit/>
-          </a:bodyPr>
-          <a:lstStyle/>
-          <a:p>
-            <a:pPr algn="l"/>
-            <a:r>
-              <a:rPr sz="1400" b="0" i="1">
+            <a:r>
+              <a:rPr lang="en-US" sz="1400" b="0" i="1" dirty="0">
                 <a:solidFill>
                   <a:srgbClr val="707070"/>
                 </a:solidFill>
                 <a:latin typeface="Calibri"/>
               </a:rPr>
-              <a:t>github.com/doruktopcu/MissVarPath-Missense-Detection</a:t>
-            </a:r>
+              <a:t>Google Collab – </a:t>
+            </a:r>
+            <a:r>
+              <a:rPr lang="en-US" sz="1400" b="0" i="1" dirty="0" err="1">
+                <a:solidFill>
+                  <a:srgbClr val="707070"/>
+                </a:solidFill>
+                <a:latin typeface="Calibri"/>
+              </a:rPr>
+              <a:t>MissVarPath</a:t>
+            </a:r>
+            <a:r>
+              <a:rPr lang="en-US" sz="1400" b="0" i="1" dirty="0">
+                <a:solidFill>
+                  <a:srgbClr val="707070"/>
+                </a:solidFill>
+                <a:latin typeface="Calibri"/>
+              </a:rPr>
+              <a:t> </a:t>
+            </a:r>
+            <a:r>
+              <a:rPr lang="en-US" sz="1400" i="1" dirty="0">
+                <a:solidFill>
+                  <a:srgbClr val="707070"/>
+                </a:solidFill>
+              </a:rPr>
+              <a:t>EDA: </a:t>
+            </a:r>
+            <a:r>
+              <a:rPr lang="en-US" sz="1400" i="1" dirty="0">
+                <a:solidFill>
+                  <a:srgbClr val="707070"/>
+                </a:solidFill>
+                <a:hlinkClick r:id="rId2"/>
+              </a:rPr>
+              <a:t>https://colab.research.google.com/drive/1Mk_cXAjRAKlRVjWplSdtV9DCR-t0P0iU</a:t>
+            </a:r>
+            <a:r>
+              <a:rPr lang="en-US" sz="1400" i="1" dirty="0">
+                <a:solidFill>
+                  <a:srgbClr val="707070"/>
+                </a:solidFill>
+              </a:rPr>
+              <a:t> </a:t>
+            </a:r>
+            <a:endParaRPr lang="en-US" sz="1400" b="0" i="1" dirty="0">
+              <a:solidFill>
+                <a:srgbClr val="707070"/>
+              </a:solidFill>
+              <a:latin typeface="Calibri"/>
+            </a:endParaRPr>
+          </a:p>
+          <a:p>
+            <a:r>
+              <a:rPr lang="en-US" sz="1400" i="1" dirty="0">
+                <a:solidFill>
+                  <a:srgbClr val="707070"/>
+                </a:solidFill>
+                <a:latin typeface="Calibri"/>
+              </a:rPr>
+              <a:t>Google Collab – Full </a:t>
+            </a:r>
+            <a:r>
+              <a:rPr lang="en-US" sz="1400" b="0" i="1" dirty="0">
+                <a:solidFill>
+                  <a:srgbClr val="707070"/>
+                </a:solidFill>
+                <a:latin typeface="Calibri"/>
+              </a:rPr>
+              <a:t>code</a:t>
+            </a:r>
+            <a:r>
+              <a:rPr lang="en-US" sz="1400" i="1" dirty="0">
+                <a:solidFill>
+                  <a:srgbClr val="707070"/>
+                </a:solidFill>
+              </a:rPr>
+              <a:t>: </a:t>
+            </a:r>
+            <a:r>
+              <a:rPr lang="en-US" sz="1400" i="1" dirty="0">
+                <a:solidFill>
+                  <a:srgbClr val="707070"/>
+                </a:solidFill>
+                <a:hlinkClick r:id="rId3"/>
+              </a:rPr>
+              <a:t>https://colab.research.google.com/drive/1ceyQjc73Gsm2bfclc7PznBS_dQ0EB74a#scrollTo=cell-0001</a:t>
+            </a:r>
+            <a:r>
+              <a:rPr lang="en-US" sz="1400" i="1" dirty="0">
+                <a:solidFill>
+                  <a:srgbClr val="707070"/>
+                </a:solidFill>
+              </a:rPr>
+              <a:t>  </a:t>
+            </a:r>
+          </a:p>
+          <a:p>
+            <a:r>
+              <a:rPr lang="en-US" sz="1400" i="1" dirty="0">
+                <a:solidFill>
+                  <a:srgbClr val="707070"/>
+                </a:solidFill>
+                <a:latin typeface="Calibri"/>
+              </a:rPr>
+              <a:t>Datasets &amp; Other files to run the full model: </a:t>
+            </a:r>
+            <a:r>
+              <a:rPr lang="en-US" sz="1400" i="1" dirty="0">
+                <a:solidFill>
+                  <a:srgbClr val="707070"/>
+                </a:solidFill>
+                <a:hlinkClick r:id="rId4"/>
+              </a:rPr>
+              <a:t>https://drive.google.com/drive/folders/1Sy5dnzYGiwCGXYRMXiCGnyJt04SuOphv?usp=sharing</a:t>
+            </a:r>
+            <a:endParaRPr lang="en-US" sz="1400" i="1" dirty="0">
+              <a:solidFill>
+                <a:srgbClr val="707070"/>
+              </a:solidFill>
+            </a:endParaRPr>
+          </a:p>
+          <a:p>
+            <a:endParaRPr lang="en-US" sz="1400" b="0" i="1" dirty="0">
+              <a:solidFill>
+                <a:srgbClr val="707070"/>
+              </a:solidFill>
+              <a:latin typeface="Calibri"/>
+            </a:endParaRPr>
           </a:p>
         </p:txBody>
       </p:sp>
@@ -10182,7 +10877,7 @@
           <a:noFill/>
         </p:spPr>
         <p:txBody>
-          <a:bodyPr wrap="square" anchor="t" lIns="0" rIns="0" tIns="0" bIns="0">
+          <a:bodyPr wrap="square" lIns="0" tIns="0" rIns="0" bIns="0" anchor="t">
             <a:spAutoFit/>
           </a:bodyPr>
           <a:lstStyle/>
@@ -10209,7 +10904,7 @@
 </file>
 
 <file path=ppt/slides/slide3.xml><?xml version="1.0" encoding="utf-8"?>
-<p:sld xmlns:a="http://schemas.openxmlformats.org/drawingml/2006/main" xmlns:p="http://schemas.openxmlformats.org/presentationml/2006/main" xmlns:r="http://schemas.openxmlformats.org/officeDocument/2006/relationships">
+<p:sld xmlns:a="http://schemas.openxmlformats.org/drawingml/2006/main" xmlns:r="http://schemas.openxmlformats.org/officeDocument/2006/relationships" xmlns:p="http://schemas.openxmlformats.org/presentationml/2006/main">
   <p:cSld>
     <p:spTree>
       <p:nvGrpSpPr>
@@ -10217,7 +10912,14 @@
         <p:cNvGrpSpPr/>
         <p:nvPr/>
       </p:nvGrpSpPr>
-      <p:grpSpPr/>
+      <p:grpSpPr>
+        <a:xfrm>
+          <a:off x="0" y="0"/>
+          <a:ext cx="0" cy="0"/>
+          <a:chOff x="0" y="0"/>
+          <a:chExt cx="0" cy="0"/>
+        </a:xfrm>
+      </p:grpSpPr>
       <p:sp>
         <p:nvSpPr>
           <p:cNvPr id="2" name="TextBox 1"/>
@@ -10226,7 +10928,7 @@
         </p:nvSpPr>
         <p:spPr>
           <a:xfrm>
-            <a:off x="548640" y="365760"/>
+            <a:off x="548640" y="182880"/>
             <a:ext cx="11064240" cy="914400"/>
           </a:xfrm>
           <a:prstGeom prst="rect">
@@ -10235,7 +10937,7 @@
           <a:noFill/>
         </p:spPr>
         <p:txBody>
-          <a:bodyPr wrap="square" anchor="t" lIns="0" rIns="0" tIns="0" bIns="0">
+          <a:bodyPr wrap="square" lIns="0" tIns="0" rIns="0" bIns="0" anchor="t">
             <a:spAutoFit/>
           </a:bodyPr>
           <a:lstStyle/>
@@ -10265,7 +10967,7 @@
         </p:nvSpPr>
         <p:spPr>
           <a:xfrm>
-            <a:off x="548640" y="1188720"/>
+            <a:off x="548640" y="826770"/>
             <a:ext cx="5943600" cy="5303520"/>
           </a:xfrm>
           <a:prstGeom prst="rect">
@@ -10274,7 +10976,7 @@
           <a:noFill/>
         </p:spPr>
         <p:txBody>
-          <a:bodyPr wrap="square" anchor="t" lIns="0" rIns="0" tIns="0" bIns="0">
+          <a:bodyPr wrap="square" lIns="0" tIns="0" rIns="0" bIns="0" anchor="t">
             <a:spAutoFit/>
           </a:bodyPr>
           <a:lstStyle/>
@@ -10288,7 +10990,7 @@
               </a:spcAft>
             </a:pPr>
             <a:r>
-              <a:rPr sz="6800" b="1" i="0">
+              <a:rPr sz="6800" b="1" i="0" dirty="0">
                 <a:solidFill>
                   <a:srgbClr val="000000"/>
                 </a:solidFill>
@@ -10307,13 +11009,40 @@
               </a:spcAft>
             </a:pPr>
             <a:r>
-              <a:rPr sz="1500" b="0" i="0">
+              <a:rPr sz="1500" b="0" i="0" dirty="0" err="1">
                 <a:solidFill>
                   <a:srgbClr val="707070"/>
                 </a:solidFill>
                 <a:latin typeface="Calibri"/>
               </a:rPr>
-              <a:t>ClinVar / OpenCRAVAT missense variants</a:t>
+              <a:t>ClinVar</a:t>
+            </a:r>
+            <a:r>
+              <a:rPr sz="1500" b="0" i="0" dirty="0">
+                <a:solidFill>
+                  <a:srgbClr val="707070"/>
+                </a:solidFill>
+                <a:latin typeface="Calibri"/>
+              </a:rPr>
+              <a:t> / </a:t>
+            </a:r>
+            <a:r>
+              <a:rPr sz="1500" b="0" i="0" dirty="0" err="1">
+                <a:solidFill>
+                  <a:srgbClr val="707070"/>
+                </a:solidFill>
+                <a:latin typeface="Calibri"/>
+              </a:rPr>
+              <a:t>OpenCRAVAT</a:t>
+            </a:r>
+            <a:r>
+              <a:rPr sz="1500" b="0" i="0" dirty="0">
+                <a:solidFill>
+                  <a:srgbClr val="707070"/>
+                </a:solidFill>
+                <a:latin typeface="Calibri"/>
+              </a:rPr>
+              <a:t> missense variants</a:t>
             </a:r>
           </a:p>
           <a:p>
@@ -10326,7 +11055,7 @@
               </a:spcAft>
             </a:pPr>
             <a:r>
-              <a:rPr sz="4200" b="1" i="0">
+              <a:rPr sz="4200" b="1" i="0" dirty="0">
                 <a:solidFill>
                   <a:srgbClr val="000000"/>
                 </a:solidFill>
@@ -10345,7 +11074,7 @@
               </a:spcAft>
             </a:pPr>
             <a:r>
-              <a:rPr sz="1500" b="0" i="0">
+              <a:rPr sz="1500" b="0" i="0" dirty="0">
                 <a:solidFill>
                   <a:srgbClr val="707070"/>
                 </a:solidFill>
@@ -10364,7 +11093,7 @@
               </a:spcAft>
             </a:pPr>
             <a:r>
-              <a:rPr sz="4200" b="1" i="0">
+              <a:rPr sz="4200" b="1" i="0" dirty="0">
                 <a:solidFill>
                   <a:srgbClr val="000000"/>
                 </a:solidFill>
@@ -10383,7 +11112,7 @@
               </a:spcAft>
             </a:pPr>
             <a:r>
-              <a:rPr sz="1500" b="0" i="0">
+              <a:rPr sz="1500" b="0" i="0" dirty="0">
                 <a:solidFill>
                   <a:srgbClr val="707070"/>
                 </a:solidFill>
@@ -10402,7 +11131,7 @@
               </a:spcAft>
             </a:pPr>
             <a:r>
-              <a:rPr sz="4200" b="1" i="0">
+              <a:rPr sz="4200" b="1" i="0" dirty="0">
                 <a:solidFill>
                   <a:srgbClr val="000000"/>
                 </a:solidFill>
@@ -10418,7 +11147,7 @@
               </a:lnSpc>
             </a:pPr>
             <a:r>
-              <a:rPr sz="1500" b="0" i="0">
+              <a:rPr sz="1500" b="0" i="0" dirty="0">
                 <a:solidFill>
                   <a:srgbClr val="707070"/>
                 </a:solidFill>
@@ -10437,7 +11166,7 @@
         </p:nvSpPr>
         <p:spPr>
           <a:xfrm>
-            <a:off x="6858000" y="1188720"/>
+            <a:off x="6858000" y="826770"/>
             <a:ext cx="4937760" cy="365760"/>
           </a:xfrm>
           <a:prstGeom prst="rect">
@@ -10446,7 +11175,7 @@
           <a:noFill/>
         </p:spPr>
         <p:txBody>
-          <a:bodyPr wrap="square" anchor="t" lIns="0" rIns="0" tIns="0" bIns="0">
+          <a:bodyPr wrap="square" lIns="0" tIns="0" rIns="0" bIns="0" anchor="t">
             <a:spAutoFit/>
           </a:bodyPr>
           <a:lstStyle/>
@@ -10476,7 +11205,7 @@
         </p:nvSpPr>
         <p:spPr>
           <a:xfrm>
-            <a:off x="6858000" y="1645920"/>
+            <a:off x="6858000" y="1236345"/>
             <a:ext cx="4937760" cy="4754880"/>
           </a:xfrm>
           <a:prstGeom prst="rect">
@@ -10485,7 +11214,7 @@
           <a:noFill/>
         </p:spPr>
         <p:txBody>
-          <a:bodyPr wrap="square" anchor="t" lIns="0" rIns="0" tIns="0" bIns="0">
+          <a:bodyPr wrap="square" lIns="0" tIns="0" rIns="0" bIns="0" anchor="t">
             <a:spAutoFit/>
           </a:bodyPr>
           <a:lstStyle/>
@@ -10499,7 +11228,7 @@
               </a:spcAft>
             </a:pPr>
             <a:r>
-              <a:rPr sz="2200" b="1" i="0">
+              <a:rPr sz="2200" b="1" i="0" dirty="0">
                 <a:solidFill>
                   <a:srgbClr val="000000"/>
                 </a:solidFill>
@@ -10518,13 +11247,31 @@
               </a:spcAft>
             </a:pPr>
             <a:r>
-              <a:rPr sz="1400" b="0" i="0">
+              <a:rPr sz="1400" b="0" i="0" dirty="0">
                 <a:solidFill>
                   <a:srgbClr val="707070"/>
                 </a:solidFill>
                 <a:latin typeface="Calibri"/>
               </a:rPr>
-              <a:t>original ClinVar label space</a:t>
+              <a:t>original </a:t>
+            </a:r>
+            <a:r>
+              <a:rPr sz="1400" b="0" i="0" dirty="0" err="1">
+                <a:solidFill>
+                  <a:srgbClr val="707070"/>
+                </a:solidFill>
+                <a:latin typeface="Calibri"/>
+              </a:rPr>
+              <a:t>ClinVar</a:t>
+            </a:r>
+            <a:r>
+              <a:rPr sz="1400" b="0" i="0" dirty="0">
+                <a:solidFill>
+                  <a:srgbClr val="707070"/>
+                </a:solidFill>
+                <a:latin typeface="Calibri"/>
+              </a:rPr>
+              <a:t> label space</a:t>
             </a:r>
           </a:p>
           <a:p>
@@ -10537,7 +11284,7 @@
               </a:spcAft>
             </a:pPr>
             <a:r>
-              <a:rPr sz="2200" b="1" i="0">
+              <a:rPr sz="2200" b="1" i="0" dirty="0">
                 <a:solidFill>
                   <a:srgbClr val="000000"/>
                 </a:solidFill>
@@ -10556,7 +11303,7 @@
               </a:spcAft>
             </a:pPr>
             <a:r>
-              <a:rPr sz="1400" b="0" i="0">
+              <a:rPr sz="1400" b="0" i="0" dirty="0">
                 <a:solidFill>
                   <a:srgbClr val="707070"/>
                 </a:solidFill>
@@ -10575,7 +11322,7 @@
               </a:spcAft>
             </a:pPr>
             <a:r>
-              <a:rPr sz="2200" b="1" i="0">
+              <a:rPr sz="2200" b="1" i="0" dirty="0">
                 <a:solidFill>
                   <a:srgbClr val="000000"/>
                 </a:solidFill>
@@ -10594,7 +11341,7 @@
               </a:spcAft>
             </a:pPr>
             <a:r>
-              <a:rPr sz="1400" b="0" i="0">
+              <a:rPr sz="1400" b="0" i="0" dirty="0">
                 <a:solidFill>
                   <a:srgbClr val="707070"/>
                 </a:solidFill>
@@ -10613,7 +11360,7 @@
               </a:spcAft>
             </a:pPr>
             <a:r>
-              <a:rPr sz="2200" b="1" i="0">
+              <a:rPr sz="2200" b="1" i="0" dirty="0">
                 <a:solidFill>
                   <a:srgbClr val="000000"/>
                 </a:solidFill>
@@ -10629,13 +11376,31 @@
               </a:lnSpc>
             </a:pPr>
             <a:r>
-              <a:rPr sz="1400" b="0" i="0">
+              <a:rPr sz="1400" b="0" i="0" dirty="0">
                 <a:solidFill>
                   <a:srgbClr val="707070"/>
                 </a:solidFill>
                 <a:latin typeface="Calibri"/>
               </a:rPr>
-              <a:t>all four ClinVar labels + VUS — essentially balanced</a:t>
+              <a:t>all four </a:t>
+            </a:r>
+            <a:r>
+              <a:rPr sz="1400" b="0" i="0" dirty="0" err="1">
+                <a:solidFill>
+                  <a:srgbClr val="707070"/>
+                </a:solidFill>
+                <a:latin typeface="Calibri"/>
+              </a:rPr>
+              <a:t>ClinVar</a:t>
+            </a:r>
+            <a:r>
+              <a:rPr sz="1400" b="0" i="0" dirty="0">
+                <a:solidFill>
+                  <a:srgbClr val="707070"/>
+                </a:solidFill>
+                <a:latin typeface="Calibri"/>
+              </a:rPr>
+              <a:t> labels + VUS — essentially balanced</a:t>
             </a:r>
           </a:p>
         </p:txBody>
@@ -10657,7 +11422,7 @@
           <a:noFill/>
         </p:spPr>
         <p:txBody>
-          <a:bodyPr wrap="square" anchor="t" lIns="0" rIns="0" tIns="0" bIns="0">
+          <a:bodyPr wrap="square" lIns="0" tIns="0" rIns="0" bIns="0" anchor="t">
             <a:spAutoFit/>
           </a:bodyPr>
           <a:lstStyle/>
@@ -10684,7 +11449,7 @@
 </file>
 
 <file path=ppt/slides/slide4.xml><?xml version="1.0" encoding="utf-8"?>
-<p:sld xmlns:a="http://schemas.openxmlformats.org/drawingml/2006/main" xmlns:p="http://schemas.openxmlformats.org/presentationml/2006/main" xmlns:r="http://schemas.openxmlformats.org/officeDocument/2006/relationships">
+<p:sld xmlns:a="http://schemas.openxmlformats.org/drawingml/2006/main" xmlns:r="http://schemas.openxmlformats.org/officeDocument/2006/relationships" xmlns:p="http://schemas.openxmlformats.org/presentationml/2006/main">
   <p:cSld>
     <p:spTree>
       <p:nvGrpSpPr>
@@ -10692,7 +11457,14 @@
         <p:cNvGrpSpPr/>
         <p:nvPr/>
       </p:nvGrpSpPr>
-      <p:grpSpPr/>
+      <p:grpSpPr>
+        <a:xfrm>
+          <a:off x="0" y="0"/>
+          <a:ext cx="0" cy="0"/>
+          <a:chOff x="0" y="0"/>
+          <a:chExt cx="0" cy="0"/>
+        </a:xfrm>
+      </p:grpSpPr>
       <p:sp>
         <p:nvSpPr>
           <p:cNvPr id="2" name="TextBox 1"/>
@@ -10710,7 +11482,7 @@
           <a:noFill/>
         </p:spPr>
         <p:txBody>
-          <a:bodyPr wrap="square" anchor="t" lIns="0" rIns="0" tIns="0" bIns="0">
+          <a:bodyPr wrap="square" lIns="0" tIns="0" rIns="0" bIns="0" anchor="t">
             <a:spAutoFit/>
           </a:bodyPr>
           <a:lstStyle/>
@@ -10749,7 +11521,7 @@
           <a:noFill/>
         </p:spPr>
         <p:txBody>
-          <a:bodyPr wrap="square" anchor="t" lIns="0" rIns="0" tIns="0" bIns="0">
+          <a:bodyPr wrap="square" lIns="0" tIns="0" rIns="0" bIns="0" anchor="t">
             <a:spAutoFit/>
           </a:bodyPr>
           <a:lstStyle/>
@@ -10812,7 +11584,7 @@
           <a:noFill/>
         </p:spPr>
         <p:txBody>
-          <a:bodyPr wrap="square" anchor="t" lIns="0" rIns="0" tIns="0" bIns="0">
+          <a:bodyPr wrap="square" lIns="0" tIns="0" rIns="0" bIns="0" anchor="t">
             <a:spAutoFit/>
           </a:bodyPr>
           <a:lstStyle/>
@@ -10839,7 +11611,7 @@
 </file>
 
 <file path=ppt/slides/slide5.xml><?xml version="1.0" encoding="utf-8"?>
-<p:sld xmlns:a="http://schemas.openxmlformats.org/drawingml/2006/main" xmlns:p="http://schemas.openxmlformats.org/presentationml/2006/main" xmlns:r="http://schemas.openxmlformats.org/officeDocument/2006/relationships">
+<p:sld xmlns:a="http://schemas.openxmlformats.org/drawingml/2006/main" xmlns:r="http://schemas.openxmlformats.org/officeDocument/2006/relationships" xmlns:p="http://schemas.openxmlformats.org/presentationml/2006/main">
   <p:cSld>
     <p:spTree>
       <p:nvGrpSpPr>
@@ -10847,7 +11619,14 @@
         <p:cNvGrpSpPr/>
         <p:nvPr/>
       </p:nvGrpSpPr>
-      <p:grpSpPr/>
+      <p:grpSpPr>
+        <a:xfrm>
+          <a:off x="0" y="0"/>
+          <a:ext cx="0" cy="0"/>
+          <a:chOff x="0" y="0"/>
+          <a:chExt cx="0" cy="0"/>
+        </a:xfrm>
+      </p:grpSpPr>
       <p:sp>
         <p:nvSpPr>
           <p:cNvPr id="2" name="TextBox 1"/>
@@ -10865,7 +11644,7 @@
           <a:noFill/>
         </p:spPr>
         <p:txBody>
-          <a:bodyPr wrap="square" anchor="t" lIns="0" rIns="0" tIns="0" bIns="0">
+          <a:bodyPr wrap="square" lIns="0" tIns="0" rIns="0" bIns="0" anchor="t">
             <a:spAutoFit/>
           </a:bodyPr>
           <a:lstStyle/>
@@ -10904,7 +11683,7 @@
           <a:noFill/>
         </p:spPr>
         <p:txBody>
-          <a:bodyPr wrap="square" anchor="t" lIns="0" rIns="0" tIns="0" bIns="0">
+          <a:bodyPr wrap="square" lIns="0" tIns="0" rIns="0" bIns="0" anchor="t">
             <a:spAutoFit/>
           </a:bodyPr>
           <a:lstStyle/>
@@ -10967,7 +11746,7 @@
           <a:noFill/>
         </p:spPr>
         <p:txBody>
-          <a:bodyPr wrap="square" anchor="t" lIns="0" rIns="0" tIns="0" bIns="0">
+          <a:bodyPr wrap="square" lIns="0" tIns="0" rIns="0" bIns="0" anchor="t">
             <a:spAutoFit/>
           </a:bodyPr>
           <a:lstStyle/>
@@ -10994,7 +11773,7 @@
 </file>
 
 <file path=ppt/slides/slide6.xml><?xml version="1.0" encoding="utf-8"?>
-<p:sld xmlns:a="http://schemas.openxmlformats.org/drawingml/2006/main" xmlns:p="http://schemas.openxmlformats.org/presentationml/2006/main" xmlns:r="http://schemas.openxmlformats.org/officeDocument/2006/relationships">
+<p:sld xmlns:a="http://schemas.openxmlformats.org/drawingml/2006/main" xmlns:r="http://schemas.openxmlformats.org/officeDocument/2006/relationships" xmlns:p="http://schemas.openxmlformats.org/presentationml/2006/main">
   <p:cSld>
     <p:spTree>
       <p:nvGrpSpPr>
@@ -11002,7 +11781,14 @@
         <p:cNvGrpSpPr/>
         <p:nvPr/>
       </p:nvGrpSpPr>
-      <p:grpSpPr/>
+      <p:grpSpPr>
+        <a:xfrm>
+          <a:off x="0" y="0"/>
+          <a:ext cx="0" cy="0"/>
+          <a:chOff x="0" y="0"/>
+          <a:chExt cx="0" cy="0"/>
+        </a:xfrm>
+      </p:grpSpPr>
       <p:sp>
         <p:nvSpPr>
           <p:cNvPr id="2" name="TextBox 1"/>
@@ -11011,7 +11797,7 @@
         </p:nvSpPr>
         <p:spPr>
           <a:xfrm>
-            <a:off x="548640" y="365760"/>
+            <a:off x="548640" y="120650"/>
             <a:ext cx="11064240" cy="914400"/>
           </a:xfrm>
           <a:prstGeom prst="rect">
@@ -11020,7 +11806,7 @@
           <a:noFill/>
         </p:spPr>
         <p:txBody>
-          <a:bodyPr wrap="square" anchor="t" lIns="0" rIns="0" tIns="0" bIns="0">
+          <a:bodyPr wrap="square" lIns="0" tIns="0" rIns="0" bIns="0" anchor="t">
             <a:spAutoFit/>
           </a:bodyPr>
           <a:lstStyle/>
@@ -11031,7 +11817,7 @@
               </a:lnSpc>
             </a:pPr>
             <a:r>
-              <a:rPr sz="3200" b="1" i="0">
+              <a:rPr sz="3200" b="1" i="0" dirty="0">
                 <a:solidFill>
                   <a:srgbClr val="000000"/>
                 </a:solidFill>
@@ -11050,8 +11836,8 @@
         </p:nvSpPr>
         <p:spPr>
           <a:xfrm>
-            <a:off x="548640" y="1097280"/>
-            <a:ext cx="11064240" cy="548640"/>
+            <a:off x="7747000" y="1097280"/>
+            <a:ext cx="3865880" cy="1019253"/>
           </a:xfrm>
           <a:prstGeom prst="rect">
             <a:avLst/>
@@ -11059,7 +11845,7 @@
           <a:noFill/>
         </p:spPr>
         <p:txBody>
-          <a:bodyPr wrap="square" anchor="t" lIns="0" rIns="0" tIns="0" bIns="0">
+          <a:bodyPr wrap="square" lIns="0" tIns="0" rIns="0" bIns="0" anchor="t">
             <a:spAutoFit/>
           </a:bodyPr>
           <a:lstStyle/>
@@ -11070,13 +11856,67 @@
               </a:lnSpc>
             </a:pPr>
             <a:r>
-              <a:rPr sz="1300" b="0" i="1">
+              <a:rPr sz="1300" b="0" i="1" dirty="0">
                 <a:solidFill>
                   <a:srgbClr val="707070"/>
                 </a:solidFill>
                 <a:latin typeface="Calibri"/>
               </a:rPr>
-              <a:t>Boxplots of headline VEP scores stratified by the 4-class label. DITTO, MetaRNN, REVEL, AlphaMissense all separate cleanly; gnomAD AF runs the other way — high frequency means benign (the ACMG BS1 rule).</a:t>
+              <a:t>Boxplots of headline VEP scores stratified by the 4-class label. DITTO, </a:t>
+            </a:r>
+            <a:r>
+              <a:rPr sz="1300" b="0" i="1" dirty="0" err="1">
+                <a:solidFill>
+                  <a:srgbClr val="707070"/>
+                </a:solidFill>
+                <a:latin typeface="Calibri"/>
+              </a:rPr>
+              <a:t>MetaRNN</a:t>
+            </a:r>
+            <a:r>
+              <a:rPr sz="1300" b="0" i="1" dirty="0">
+                <a:solidFill>
+                  <a:srgbClr val="707070"/>
+                </a:solidFill>
+                <a:latin typeface="Calibri"/>
+              </a:rPr>
+              <a:t>, REVEL, </a:t>
+            </a:r>
+            <a:r>
+              <a:rPr sz="1300" b="0" i="1" dirty="0" err="1">
+                <a:solidFill>
+                  <a:srgbClr val="707070"/>
+                </a:solidFill>
+                <a:latin typeface="Calibri"/>
+              </a:rPr>
+              <a:t>AlphaMissense</a:t>
+            </a:r>
+            <a:r>
+              <a:rPr sz="1300" b="0" i="1" dirty="0">
+                <a:solidFill>
+                  <a:srgbClr val="707070"/>
+                </a:solidFill>
+                <a:latin typeface="Calibri"/>
+              </a:rPr>
+              <a:t> all separate cleanly; </a:t>
+            </a:r>
+            <a:r>
+              <a:rPr sz="1300" b="0" i="1" dirty="0" err="1">
+                <a:solidFill>
+                  <a:srgbClr val="707070"/>
+                </a:solidFill>
+                <a:latin typeface="Calibri"/>
+              </a:rPr>
+              <a:t>gnomAD</a:t>
+            </a:r>
+            <a:r>
+              <a:rPr sz="1300" b="0" i="1" dirty="0">
+                <a:solidFill>
+                  <a:srgbClr val="707070"/>
+                </a:solidFill>
+                <a:latin typeface="Calibri"/>
+              </a:rPr>
+              <a:t> AF runs the other way — high frequency means benign (the ACMG BS1 rule).</a:t>
             </a:r>
           </a:p>
         </p:txBody>
@@ -11097,8 +11937,8 @@
         </p:blipFill>
         <p:spPr>
           <a:xfrm>
-            <a:off x="3451860" y="1920240"/>
-            <a:ext cx="5257800" cy="4206240"/>
+            <a:off x="133350" y="822960"/>
+            <a:ext cx="7505700" cy="6004560"/>
           </a:xfrm>
           <a:prstGeom prst="rect">
             <a:avLst/>
@@ -11122,7 +11962,7 @@
           <a:noFill/>
         </p:spPr>
         <p:txBody>
-          <a:bodyPr wrap="square" anchor="t" lIns="0" rIns="0" tIns="0" bIns="0">
+          <a:bodyPr wrap="square" lIns="0" tIns="0" rIns="0" bIns="0" anchor="t">
             <a:spAutoFit/>
           </a:bodyPr>
           <a:lstStyle/>
@@ -11149,7 +11989,7 @@
 </file>
 
 <file path=ppt/slides/slide7.xml><?xml version="1.0" encoding="utf-8"?>
-<p:sld xmlns:a="http://schemas.openxmlformats.org/drawingml/2006/main" xmlns:p="http://schemas.openxmlformats.org/presentationml/2006/main" xmlns:r="http://schemas.openxmlformats.org/officeDocument/2006/relationships">
+<p:sld xmlns:a="http://schemas.openxmlformats.org/drawingml/2006/main" xmlns:r="http://schemas.openxmlformats.org/officeDocument/2006/relationships" xmlns:p="http://schemas.openxmlformats.org/presentationml/2006/main">
   <p:cSld>
     <p:spTree>
       <p:nvGrpSpPr>
@@ -11157,7 +11997,14 @@
         <p:cNvGrpSpPr/>
         <p:nvPr/>
       </p:nvGrpSpPr>
-      <p:grpSpPr/>
+      <p:grpSpPr>
+        <a:xfrm>
+          <a:off x="0" y="0"/>
+          <a:ext cx="0" cy="0"/>
+          <a:chOff x="0" y="0"/>
+          <a:chExt cx="0" cy="0"/>
+        </a:xfrm>
+      </p:grpSpPr>
       <p:sp>
         <p:nvSpPr>
           <p:cNvPr id="2" name="TextBox 1"/>
@@ -11175,7 +12022,7 @@
           <a:noFill/>
         </p:spPr>
         <p:txBody>
-          <a:bodyPr wrap="square" anchor="t" lIns="0" rIns="0" tIns="0" bIns="0">
+          <a:bodyPr wrap="square" lIns="0" tIns="0" rIns="0" bIns="0" anchor="t">
             <a:spAutoFit/>
           </a:bodyPr>
           <a:lstStyle/>
@@ -11214,7 +12061,7 @@
           <a:noFill/>
         </p:spPr>
         <p:txBody>
-          <a:bodyPr wrap="square" anchor="t" lIns="0" rIns="0" tIns="0" bIns="0">
+          <a:bodyPr wrap="square" lIns="0" tIns="0" rIns="0" bIns="0" anchor="t">
             <a:spAutoFit/>
           </a:bodyPr>
           <a:lstStyle/>
@@ -11253,7 +12100,7 @@
           <a:noFill/>
         </p:spPr>
         <p:txBody>
-          <a:bodyPr wrap="square" anchor="t" lIns="0" rIns="0" tIns="0" bIns="0">
+          <a:bodyPr wrap="square" lIns="0" tIns="0" rIns="0" bIns="0" anchor="t">
             <a:spAutoFit/>
           </a:bodyPr>
           <a:lstStyle/>
@@ -11542,7 +12389,7 @@
           <a:noFill/>
         </p:spPr>
         <p:txBody>
-          <a:bodyPr wrap="square" anchor="t" lIns="0" rIns="0" tIns="0" bIns="0">
+          <a:bodyPr wrap="square" lIns="0" tIns="0" rIns="0" bIns="0" anchor="t">
             <a:spAutoFit/>
           </a:bodyPr>
           <a:lstStyle/>
@@ -11581,7 +12428,7 @@
           <a:noFill/>
         </p:spPr>
         <p:txBody>
-          <a:bodyPr wrap="square" anchor="t" lIns="0" rIns="0" tIns="0" bIns="0">
+          <a:bodyPr wrap="square" lIns="0" tIns="0" rIns="0" bIns="0" anchor="t">
             <a:spAutoFit/>
           </a:bodyPr>
           <a:lstStyle/>
@@ -11616,7 +12463,7 @@
           <a:noFill/>
         </p:spPr>
         <p:txBody>
-          <a:bodyPr wrap="square" anchor="t" lIns="0" rIns="0" tIns="0" bIns="0">
+          <a:bodyPr wrap="square" lIns="0" tIns="0" rIns="0" bIns="0" anchor="t">
             <a:spAutoFit/>
           </a:bodyPr>
           <a:lstStyle/>
@@ -11655,7 +12502,7 @@
           <a:noFill/>
         </p:spPr>
         <p:txBody>
-          <a:bodyPr wrap="square" anchor="t" lIns="0" rIns="0" tIns="0" bIns="0">
+          <a:bodyPr wrap="square" lIns="0" tIns="0" rIns="0" bIns="0" anchor="t">
             <a:spAutoFit/>
           </a:bodyPr>
           <a:lstStyle/>
@@ -11690,7 +12537,7 @@
           <a:noFill/>
         </p:spPr>
         <p:txBody>
-          <a:bodyPr wrap="square" anchor="t" lIns="0" rIns="0" tIns="0" bIns="0">
+          <a:bodyPr wrap="square" lIns="0" tIns="0" rIns="0" bIns="0" anchor="t">
             <a:spAutoFit/>
           </a:bodyPr>
           <a:lstStyle/>
@@ -11729,7 +12576,7 @@
           <a:noFill/>
         </p:spPr>
         <p:txBody>
-          <a:bodyPr wrap="square" anchor="t" lIns="0" rIns="0" tIns="0" bIns="0">
+          <a:bodyPr wrap="square" lIns="0" tIns="0" rIns="0" bIns="0" anchor="t">
             <a:spAutoFit/>
           </a:bodyPr>
           <a:lstStyle/>
@@ -11764,7 +12611,7 @@
           <a:noFill/>
         </p:spPr>
         <p:txBody>
-          <a:bodyPr wrap="square" anchor="t" lIns="0" rIns="0" tIns="0" bIns="0">
+          <a:bodyPr wrap="square" lIns="0" tIns="0" rIns="0" bIns="0" anchor="t">
             <a:spAutoFit/>
           </a:bodyPr>
           <a:lstStyle/>
@@ -11803,7 +12650,7 @@
           <a:noFill/>
         </p:spPr>
         <p:txBody>
-          <a:bodyPr wrap="square" anchor="t" lIns="0" rIns="0" tIns="0" bIns="0">
+          <a:bodyPr wrap="square" lIns="0" tIns="0" rIns="0" bIns="0" anchor="t">
             <a:spAutoFit/>
           </a:bodyPr>
           <a:lstStyle/>
@@ -11838,7 +12685,7 @@
           <a:noFill/>
         </p:spPr>
         <p:txBody>
-          <a:bodyPr wrap="square" anchor="t" lIns="0" rIns="0" tIns="0" bIns="0">
+          <a:bodyPr wrap="square" lIns="0" tIns="0" rIns="0" bIns="0" anchor="t">
             <a:spAutoFit/>
           </a:bodyPr>
           <a:lstStyle/>
@@ -11877,7 +12724,7 @@
           <a:noFill/>
         </p:spPr>
         <p:txBody>
-          <a:bodyPr wrap="square" anchor="t" lIns="0" rIns="0" tIns="0" bIns="0">
+          <a:bodyPr wrap="square" lIns="0" tIns="0" rIns="0" bIns="0" anchor="t">
             <a:spAutoFit/>
           </a:bodyPr>
           <a:lstStyle/>
@@ -11912,7 +12759,7 @@
           <a:noFill/>
         </p:spPr>
         <p:txBody>
-          <a:bodyPr wrap="square" anchor="t" lIns="0" rIns="0" tIns="0" bIns="0">
+          <a:bodyPr wrap="square" lIns="0" tIns="0" rIns="0" bIns="0" anchor="t">
             <a:spAutoFit/>
           </a:bodyPr>
           <a:lstStyle/>
@@ -11951,7 +12798,7 @@
           <a:noFill/>
         </p:spPr>
         <p:txBody>
-          <a:bodyPr wrap="square" anchor="t" lIns="0" rIns="0" tIns="0" bIns="0">
+          <a:bodyPr wrap="square" lIns="0" tIns="0" rIns="0" bIns="0" anchor="t">
             <a:spAutoFit/>
           </a:bodyPr>
           <a:lstStyle/>
@@ -11990,7 +12837,7 @@
           <a:noFill/>
         </p:spPr>
         <p:txBody>
-          <a:bodyPr wrap="square" anchor="t" lIns="0" rIns="0" tIns="0" bIns="0">
+          <a:bodyPr wrap="square" lIns="0" tIns="0" rIns="0" bIns="0" anchor="t">
             <a:spAutoFit/>
           </a:bodyPr>
           <a:lstStyle/>
@@ -12017,7 +12864,7 @@
 </file>
 
 <file path=ppt/slides/slide8.xml><?xml version="1.0" encoding="utf-8"?>
-<p:sld xmlns:a="http://schemas.openxmlformats.org/drawingml/2006/main" xmlns:p="http://schemas.openxmlformats.org/presentationml/2006/main" xmlns:r="http://schemas.openxmlformats.org/officeDocument/2006/relationships">
+<p:sld xmlns:a="http://schemas.openxmlformats.org/drawingml/2006/main" xmlns:r="http://schemas.openxmlformats.org/officeDocument/2006/relationships" xmlns:p="http://schemas.openxmlformats.org/presentationml/2006/main">
   <p:cSld>
     <p:spTree>
       <p:nvGrpSpPr>
@@ -12025,7 +12872,14 @@
         <p:cNvGrpSpPr/>
         <p:nvPr/>
       </p:nvGrpSpPr>
-      <p:grpSpPr/>
+      <p:grpSpPr>
+        <a:xfrm>
+          <a:off x="0" y="0"/>
+          <a:ext cx="0" cy="0"/>
+          <a:chOff x="0" y="0"/>
+          <a:chExt cx="0" cy="0"/>
+        </a:xfrm>
+      </p:grpSpPr>
       <p:sp>
         <p:nvSpPr>
           <p:cNvPr id="2" name="TextBox 1"/>
@@ -12043,7 +12897,7 @@
           <a:noFill/>
         </p:spPr>
         <p:txBody>
-          <a:bodyPr wrap="square" anchor="t" lIns="0" rIns="0" tIns="0" bIns="0">
+          <a:bodyPr wrap="square" lIns="0" tIns="0" rIns="0" bIns="0" anchor="t">
             <a:spAutoFit/>
           </a:bodyPr>
           <a:lstStyle/>
@@ -12082,7 +12936,7 @@
           <a:noFill/>
         </p:spPr>
         <p:txBody>
-          <a:bodyPr wrap="square" anchor="t" lIns="0" rIns="0" tIns="0" bIns="0">
+          <a:bodyPr wrap="square" lIns="0" tIns="0" rIns="0" bIns="0" anchor="t">
             <a:spAutoFit/>
           </a:bodyPr>
           <a:lstStyle/>
@@ -12117,7 +12971,7 @@
           <a:noFill/>
         </p:spPr>
         <p:txBody>
-          <a:bodyPr wrap="square" anchor="t" lIns="0" rIns="0" tIns="0" bIns="0">
+          <a:bodyPr wrap="square" lIns="0" tIns="0" rIns="0" bIns="0" anchor="t">
             <a:spAutoFit/>
           </a:bodyPr>
           <a:lstStyle/>
@@ -12152,7 +13006,7 @@
           <a:noFill/>
         </p:spPr>
         <p:txBody>
-          <a:bodyPr wrap="square" anchor="t" lIns="0" rIns="0" tIns="0" bIns="0">
+          <a:bodyPr wrap="square" lIns="0" tIns="0" rIns="0" bIns="0" anchor="t">
             <a:spAutoFit/>
           </a:bodyPr>
           <a:lstStyle/>
@@ -12187,7 +13041,7 @@
           <a:noFill/>
         </p:spPr>
         <p:txBody>
-          <a:bodyPr wrap="square" anchor="t" lIns="0" rIns="0" tIns="0" bIns="0">
+          <a:bodyPr wrap="square" lIns="0" tIns="0" rIns="0" bIns="0" anchor="t">
             <a:spAutoFit/>
           </a:bodyPr>
           <a:lstStyle/>
@@ -12222,7 +13076,7 @@
           <a:noFill/>
         </p:spPr>
         <p:txBody>
-          <a:bodyPr wrap="square" anchor="t" lIns="0" rIns="0" tIns="0" bIns="0">
+          <a:bodyPr wrap="square" lIns="0" tIns="0" rIns="0" bIns="0" anchor="t">
             <a:spAutoFit/>
           </a:bodyPr>
           <a:lstStyle/>
@@ -12257,7 +13111,7 @@
           <a:noFill/>
         </p:spPr>
         <p:txBody>
-          <a:bodyPr wrap="square" anchor="t" lIns="0" rIns="0" tIns="0" bIns="0">
+          <a:bodyPr wrap="square" lIns="0" tIns="0" rIns="0" bIns="0" anchor="t">
             <a:spAutoFit/>
           </a:bodyPr>
           <a:lstStyle/>
@@ -12289,7 +13143,7 @@
         </p:xfrm>
         <a:graphic>
           <a:graphicData uri="http://schemas.openxmlformats.org/drawingml/2006/chart">
-            <c:chart xmlns:c="http://schemas.openxmlformats.org/drawingml/2006/chart" r:id="rId2"/>
+            <c:chart xmlns:c="http://schemas.openxmlformats.org/drawingml/2006/chart" xmlns:r="http://schemas.openxmlformats.org/officeDocument/2006/relationships" r:id="rId2"/>
           </a:graphicData>
         </a:graphic>
       </p:graphicFrame>
@@ -12310,7 +13164,7 @@
           <a:noFill/>
         </p:spPr>
         <p:txBody>
-          <a:bodyPr wrap="square" anchor="t" lIns="0" rIns="0" tIns="0" bIns="0">
+          <a:bodyPr wrap="square" lIns="0" tIns="0" rIns="0" bIns="0" anchor="t">
             <a:spAutoFit/>
           </a:bodyPr>
           <a:lstStyle/>
@@ -12337,7 +13191,7 @@
 </file>
 
 <file path=ppt/slides/slide9.xml><?xml version="1.0" encoding="utf-8"?>
-<p:sld xmlns:a="http://schemas.openxmlformats.org/drawingml/2006/main" xmlns:p="http://schemas.openxmlformats.org/presentationml/2006/main" xmlns:r="http://schemas.openxmlformats.org/officeDocument/2006/relationships">
+<p:sld xmlns:a="http://schemas.openxmlformats.org/drawingml/2006/main" xmlns:r="http://schemas.openxmlformats.org/officeDocument/2006/relationships" xmlns:p="http://schemas.openxmlformats.org/presentationml/2006/main">
   <p:cSld>
     <p:spTree>
       <p:nvGrpSpPr>
@@ -12345,7 +13199,14 @@
         <p:cNvGrpSpPr/>
         <p:nvPr/>
       </p:nvGrpSpPr>
-      <p:grpSpPr/>
+      <p:grpSpPr>
+        <a:xfrm>
+          <a:off x="0" y="0"/>
+          <a:ext cx="0" cy="0"/>
+          <a:chOff x="0" y="0"/>
+          <a:chExt cx="0" cy="0"/>
+        </a:xfrm>
+      </p:grpSpPr>
       <p:sp>
         <p:nvSpPr>
           <p:cNvPr id="2" name="TextBox 1"/>
@@ -12363,7 +13224,7 @@
           <a:noFill/>
         </p:spPr>
         <p:txBody>
-          <a:bodyPr wrap="square" anchor="t" lIns="0" rIns="0" tIns="0" bIns="0">
+          <a:bodyPr wrap="square" lIns="0" tIns="0" rIns="0" bIns="0" anchor="t">
             <a:spAutoFit/>
           </a:bodyPr>
           <a:lstStyle/>
@@ -12402,7 +13263,7 @@
           <a:noFill/>
         </p:spPr>
         <p:txBody>
-          <a:bodyPr wrap="square" anchor="t" lIns="0" rIns="0" tIns="0" bIns="0">
+          <a:bodyPr wrap="square" lIns="0" tIns="0" rIns="0" bIns="0" anchor="t">
             <a:spAutoFit/>
           </a:bodyPr>
           <a:lstStyle/>
@@ -12465,7 +13326,7 @@
           <a:noFill/>
         </p:spPr>
         <p:txBody>
-          <a:bodyPr wrap="square" anchor="t" lIns="0" rIns="0" tIns="0" bIns="0">
+          <a:bodyPr wrap="square" lIns="0" tIns="0" rIns="0" bIns="0" anchor="t">
             <a:spAutoFit/>
           </a:bodyPr>
           <a:lstStyle/>
